--- a/AI-in-One-v2.0.0-Storyboard.pptx
+++ b/AI-in-One-v2.0.0-Storyboard.pptx
@@ -873,7 +873,7 @@
           <a:p>
             <a:r>
               <a:rPr lang="en-US" dirty="0"/>
-              <a:t>1. Chat users, licensed users and inactive licensed users at a glance.
+              <a:t>1. Chat users, active licensed users and inactive licensed users at a glance. Agent-only licensed users are active; active plus inactive reconciles to the licensed directory population.
 2. The unlicensed usage leaderboard ranks departments by how much people without a Microsoft 365 Copilot license use Copilot Chat, with median weekly sessions and active days.
 3. The scatter plots each department by how often and how regularly people use Copilot Chat. Departments toward the High Priority corner use it most. The reference lines are the selected group's medians, not targets.
 The score weights weekly sessions 60%, weekly active days 30% and sessions per active day 10%. These weights are choices made for the score, not universal measures of value.
@@ -1328,7 +1328,10 @@
 Who is using Copilot? Start on Copilot Usage Explorer, then compare experiences on the two Copilot Overall pages.
 Is it becoming a habit? The habit pages show how many days people used Copilot in a month. The usage-trend pages show whether people come back each week.
 Where should we invest next? The agent pages show which agents reach people and keep them coming back. License Prioritization helps start a licensing conversation.
-Keep the same team and dates as you move between pages; your selections follow you automatically.</a:t>
+Keep the same team and dates as you move between pages; your selections follow you automatically.
+Licensed activity includes every recorded experience, including agent-only users. Active plus inactive licensed users equals the licensed directory population after dates, scope, RLS and selected usage-band membership. A band selection cannot increase inactive licensed users.
+The relevant tables and tooltips pair prompts and prompts per session with sessions. Weekly comparison bars and applicable month-over-month cards include prompt counterparts; line/area, top-N session and scatter series remain unchanged. Prompt counts reflect Purview audit coverage and are not guaranteed to match Viva Insights or Microsoft 365 admin center reports.
+Usage bands recalculate from distinct prompts per active week among active users in the selected dates and authorized organization, reporting-team and license population. Each family is calculated independently, then selected memberships intersect. Ties share a band. No Usage includes eligible people without that family's recorded activity.</a:t>
             </a:r>
           </a:p>
         </p:txBody>
@@ -1873,7 +1876,10 @@
               <a:t>This page focuses on people recorded with a Microsoft 365 Copilot license in the supplied people file.
 Read users, sessions and apps together rather than choosing one number as a verdict on licenses. Some apps record more detail than others, so a small count can reflect how activity is recorded.
 Month-over-month change compares sessions with the previous period for the selected dates. It isn't a target.
-Usage alone doesn't prove productivity gains or that a license paid for itself. Use the pattern to ask the team what is working and where training or access would help.</a:t>
+Usage alone doesn't prove productivity gains or that a license paid for itself. Use the pattern to ask the team what is working and where training or access would help.
+Licensed activity includes every recorded experience, including agent-only users. Active plus inactive licensed users equals the licensed directory population after dates, scope, RLS and selected usage-band membership. A band selection cannot increase inactive licensed users.
+The relevant tables and tooltips pair prompts and prompts per session with sessions. Weekly comparison bars and applicable month-over-month cards include prompt counterparts; line/area, top-N session and scatter series remain unchanged. Prompt counts reflect Purview audit coverage and are not guaranteed to match Viva Insights or Microsoft 365 admin center reports.
+Usage bands recalculate from distinct prompts per active week among active users in the selected dates and authorized organization, reporting-team and license population. Each family is calculated independently, then selected memberships intersect. Ties share a band. No Usage includes eligible people without that family's recorded activity.</a:t>
             </a:r>
           </a:p>
         </p:txBody>
@@ -3735,7 +3741,7 @@
                 <a:ea typeface="Segoe UI" pitchFamily="34" charset="-122"/>
                 <a:cs typeface="Segoe UI" pitchFamily="34" charset="-120"/>
               </a:rPr>
-              <a:t>Active agents, agent users, agent adoption, weekly sessions per user, change in sessions and repeat users.</a:t>
+              <a:t>Active agents, agent users, adoption, weekly prompts/sessions, their month-over-month changes and repeat users.</a:t>
             </a:r>
             <a:endParaRPr lang="en-US" sz="1500" dirty="0"/>
           </a:p>
@@ -4488,7 +4494,7 @@
                 <a:ea typeface="Segoe UI" pitchFamily="34" charset="-122"/>
                 <a:cs typeface="Segoe UI" pitchFamily="34" charset="-120"/>
               </a:rPr>
-              <a:t>Agents: Health Check gives every agent a starting label, based on your team and dates.</a:t>
+              <a:t>Health Check separates catalog IDs from activity-only agents; review labels follow your scope.</a:t>
             </a:r>
             <a:endParaRPr lang="en-US" sz="2000" dirty="0"/>
           </a:p>
@@ -5483,7 +5489,7 @@
                 <a:ea typeface="Segoe UI" pitchFamily="34" charset="-122"/>
                 <a:cs typeface="Segoe UI" pitchFamily="34" charset="-120"/>
               </a:rPr>
-              <a:t>These labels help us choose which agent owners to talk to. They aren't decisions on their own.</a:t>
+              <a:t>Creator and Developer Name identify catalog ownership, even in aggregate mode. Review labels start conversations.</a:t>
             </a:r>
             <a:endParaRPr lang="en-US" sz="1500" dirty="0"/>
           </a:p>
@@ -19418,7 +19424,7 @@
                 <a:ea typeface="Segoe UI" pitchFamily="34" charset="-122"/>
                 <a:cs typeface="Segoe UI" pitchFamily="34" charset="-120"/>
               </a:rPr>
-              <a:t>Agent users, chat users, licensed users, and licensed users with no recorded licensed-chat activity.</a:t>
+              <a:t>Agent users, chat users, and active or inactive licensed users across all recorded experiences.</a:t>
             </a:r>
             <a:endParaRPr lang="en-US" sz="1500" dirty="0"/>
           </a:p>
@@ -20901,7 +20907,7 @@
                 <a:ea typeface="Segoe UI" pitchFamily="34" charset="-122"/>
                 <a:cs typeface="Segoe UI" pitchFamily="34" charset="-120"/>
               </a:rPr>
-              <a:t>Users and weekly sessions per user for agents, Copilot Chat and licensed Copilot.</a:t>
+              <a:t>Users, prompts, prompts per session and weekly prompt/session comparisons for agents, chat and licensed Copilot.</a:t>
             </a:r>
             <a:endParaRPr lang="en-US" sz="1500" dirty="0"/>
           </a:p>
@@ -24207,7 +24213,7 @@
                 <a:ea typeface="Segoe UI" pitchFamily="34" charset="-122"/>
                 <a:cs typeface="Segoe UI" pitchFamily="34" charset="-120"/>
               </a:rPr>
-              <a:t>Licensed users, inactive licensed users, sessions, weekly sessions per user, month-over-month change and weekly active days.</a:t>
+              <a:t>Active and inactive licensed users, sessions, weekly prompts/sessions, prompt/session month-over-month change and weekly active days.</a:t>
             </a:r>
             <a:endParaRPr lang="en-US" sz="1500" dirty="0"/>
           </a:p>
@@ -24573,7 +24579,7 @@
                 <a:ea typeface="Segoe UI" pitchFamily="34" charset="-122"/>
                 <a:cs typeface="Segoe UI" pitchFamily="34" charset="-120"/>
               </a:rPr>
-              <a:t>Average sessions per active week for each usage group, from the top 10% to the bottom 25%.</a:t>
+              <a:t>Weekly prompts and sessions by dynamic band. Distinct prompts per active week set the bands for the selected dates and population.</a:t>
             </a:r>
             <a:endParaRPr lang="en-US" sz="1500" dirty="0"/>
           </a:p>
@@ -25792,7 +25798,7 @@
                 <a:ea typeface="Segoe UI" pitchFamily="34" charset="-122"/>
                 <a:cs typeface="Segoe UI" pitchFamily="34" charset="-120"/>
               </a:rPr>
-              <a:t>Chat users, weekly sessions per user, month-over-month change and weekly active days.</a:t>
+              <a:t>Chat users, weekly prompts and sessions per user, prompt/session month-over-month change and weekly active days.</a:t>
             </a:r>
             <a:endParaRPr lang="en-US" sz="1500" dirty="0"/>
           </a:p>

--- a/AI-in-One-v2.0.0-Storyboard.pptx
+++ b/AI-in-One-v2.0.0-Storyboard.pptx
@@ -692,7 +692,7 @@
           <a:p>
             <a:r>
               <a:rPr lang="en-US" dirty="0"/>
-              <a:t>The review label combines reach and recency for the selected team and dates.
+              <a:t>The review label combines reach and recency for the selected team and dates. System-generated agents and Security Copilot entries ("Usage not tracked here") are not review targets, even when system agents are included.
 No usage: no recorded activity in this selection. Review: last activity more than 60 days before the end of the selected dates. High impact: user and organization thresholds are met for the agent's type (100 users and 10 organizations for Microsoft agents, 30 and 3 for Agent Builder, 50 and 5 for others). Keep: everything else with recent use.
 These thresholds are rules of thumb built into the report, not validated benchmarks. An agent can be valuable for an occasional specialist task without much activity. Missing catalog details are different from no recorded use, and a group below the minimum size may not show at all.
 Before improving, sharing or retiring an agent, ask its owner what it's for and what its users think.</a:t>
@@ -970,7 +970,7 @@
 3. The report counts user prompts and conversations. It doesn't measure answer quality, time saved, revenue or employee performance.
 4. Habit cards use the month before the end of the selected dates.
 5. License status comes from the people file supplied when the data was collected, not a history of every change.
-6. Activity categories are inferred from audit records and agent descriptions; they aren't measured outcomes.
+6. For store agents, Developer Name identifies the publisher, not a tenant creator. System-generated and untracked entries are not review targets. Activity categories remain clues, not measured outcomes.
 The Metric Glossary &amp; Guide page in the report has a definition for every number.</a:t>
             </a:r>
           </a:p>
@@ -1419,7 +1419,7 @@
             <a:r>
               <a:rPr lang="en-US" dirty="0"/>
               <a:t>These five steps work for any audience.
-1. Choose the people. Org filters, beside Clear filters, lets you pick company, division, department, reporting team, user and license. Reporting team includes a manager's direct and indirect reports.
+1. Choose the people. Org filters, beside Clear filters, lets you pick company, division, department, reporting team, user and license. Include system agents defaults to No; Clear filters restores No. Reporting team includes a manager's direct and indirect reports.
 2. Choose the dates. End on a full month: the habit pages describe the month before the end of your selected range.
 3. See the whole picture on Copilot Usage Explorer.
 4. Look closer on the comparison, habit and agent pages.
@@ -1606,7 +1606,7 @@
               <a:t>Combined Trends compares the three main experiences over time: agents, Copilot Chat used without a Microsoft 365 Copilot license, and licensed Microsoft 365 Copilot.
 The key message: one person can appear in several groups. Don't add the user counts together and don't assume people moved from one experience to another.
 Weekly sessions per user is each active user's sessions divided by the weeks they were active, then averaged. It is not divided by every calendar week.
-Inactive licensed users are licensed people with no recorded licensed-chat activity in the selected dates. That alone doesn't prove a license has no value; it's a reason to ask what would help.</a:t>
+Inactive licensed users are licensed people with no recorded activity across any experience in the selected dates; agent-only users are active. That alone doesn't prove a license has no value; it's a reason to ask what would help.</a:t>
             </a:r>
           </a:p>
         </p:txBody>
@@ -1696,7 +1696,7 @@
               <a:t>Use heat colors to spot the busiest departments quickly.
 The agent percentages answer one question per table: of this table's chat users, what share also used agents? Agent-only users and people with unknown license status don't inflate it.
 License status comes from the people file supplied when the data was collected. It is a snapshot, not a history of every license change. Unknown is shown as Unknown, never treated as unlicensed.
-Department results come first. Individual people appear only when the report owner has approved Minimum Group Size 1.</a:t>
+Department results come first. Individual people appear only with approved Minimum Group Size 1. Agent prompts and prompts per session also stay blank when this table's licensed or unlicensed row is below its minimum, even if agent scope qualifies.</a:t>
             </a:r>
           </a:p>
         </p:txBody>
@@ -1785,7 +1785,7 @@
               <a:rPr lang="en-US" dirty="0"/>
               <a:t>There are three habit pages: agents, M365 Copilot and Copilot Chat. They all use the same four groups: Light is 1 to 5 active days in the month, Moderate 6 to 10, Frequent 11 to 15 and Daily 16 or more.
 The habit month is printed at the top of each habit page. It is the calendar month before the end of your selected dates. If your dates end on 30 September, the cards describe August.
-The cards and the previous-month bars describe that month. The department and agent tables describe the whole selected period, so their totals won't match the cards.
+The cards and the previous-month bars describe that month. The department and agent tables describe the whole selected period, so their totals may differ from the cards.
 Use habits to discuss routines, not to rate people. Different roles naturally use Copilot on different numbers of days.</a:t>
             </a:r>
           </a:p>
@@ -1875,7 +1875,7 @@
               <a:rPr lang="en-US" dirty="0"/>
               <a:t>This page focuses on people recorded with a Microsoft 365 Copilot license in the supplied people file.
 Read users, sessions and apps together rather than choosing one number as a verdict on licenses. Some apps record more detail than others, so a small count can reflect how activity is recorded.
-Month-over-month change compares sessions with the previous period for the selected dates. It isn't a target.
+Month-over-month change compares prompts and sessions with the previous month for the selected dates. It isn't a target.
 Usage alone doesn't prove productivity gains or that a license paid for itself. Use the pattern to ask the team what is working and where training or access would help.
 Licensed activity includes every recorded experience, including agent-only users. Active plus inactive licensed users equals the licensed directory population after dates, scope, RLS and selected usage-band membership. A band selection cannot increase inactive licensed users.
 The relevant tables and tooltips pair prompts and prompts per session with sessions. Weekly comparison bars and applicable month-over-month cards include prompt counterparts; line/area, top-N session and scatter series remain unchanged. Prompt counts reflect Purview audit coverage and are not guaranteed to match Viva Insights or Microsoft 365 admin center reports.
@@ -3741,7 +3741,7 @@
                 <a:ea typeface="Segoe UI" pitchFamily="34" charset="-122"/>
                 <a:cs typeface="Segoe UI" pitchFamily="34" charset="-120"/>
               </a:rPr>
-              <a:t>Active agents, agent users, adoption, weekly prompts/sessions, their month-over-month changes and repeat users.</a:t>
+              <a:t>Active agents = matched + activity-only + ambiguous. All counts share your scope.</a:t>
             </a:r>
             <a:endParaRPr lang="en-US" sz="1500" dirty="0"/>
           </a:p>
@@ -4494,7 +4494,7 @@
                 <a:ea typeface="Segoe UI" pitchFamily="34" charset="-122"/>
                 <a:cs typeface="Segoe UI" pitchFamily="34" charset="-120"/>
               </a:rPr>
-              <a:t>Health Check separates catalog IDs from activity-only agents; review labels follow your scope.</a:t>
+              <a:t>Platform and catalog status are separate; system agents are excluded by default.</a:t>
             </a:r>
             <a:endParaRPr lang="en-US" sz="2000" dirty="0"/>
           </a:p>
@@ -5380,7 +5380,7 @@
                 <a:ea typeface="Segoe UI" pitchFamily="34" charset="-122"/>
                 <a:cs typeface="Segoe UI" pitchFamily="34" charset="-120"/>
               </a:rPr>
-              <a:t>High impact means at least 100 users and 10 organizations for Microsoft agents, 30 and 3 for Agent Builder agents, and 50 and 5 for others. These are starting points, not proof of value.</a:t>
+              <a:t>Security Copilot shows "Usage not tracked here". Include system agents defaults to No; neither group is a review target. Other review labels follow your people and dates.</a:t>
             </a:r>
             <a:endParaRPr lang="en-US" sz="1350" dirty="0"/>
           </a:p>
@@ -5489,7 +5489,7 @@
                 <a:ea typeface="Segoe UI" pitchFamily="34" charset="-122"/>
                 <a:cs typeface="Segoe UI" pitchFamily="34" charset="-120"/>
               </a:rPr>
-              <a:t>Creator and Developer Name identify catalog ownership, even in aggregate mode. Review labels start conversations.</a:t>
+              <a:t>Catalog status tells us how an agent matched; its platform tells us where it was built.</a:t>
             </a:r>
             <a:endParaRPr lang="en-US" sz="1500" dirty="0"/>
           </a:p>
@@ -5767,7 +5767,7 @@
                 <a:ea typeface="Segoe UI" pitchFamily="34" charset="-122"/>
                 <a:cs typeface="Segoe UI" pitchFamily="34" charset="-120"/>
               </a:rPr>
-              <a:t>Agent Details shows who uses an agent, how much, where and whether they return.</a:t>
+              <a:t>Agent Details adds type and catalog status. Duplicate names use short ID suffixes.</a:t>
             </a:r>
             <a:endParaRPr lang="en-US" sz="2000" dirty="0"/>
           </a:p>
@@ -7250,7 +7250,7 @@
                 <a:ea typeface="Segoe UI" pitchFamily="34" charset="-122"/>
                 <a:cs typeface="Segoe UI" pitchFamily="34" charset="-120"/>
               </a:rPr>
-              <a:t>License Prioritization shows where Copilot Chat use could support a licensing discussion.</a:t>
+              <a:t>Rank compares unlicensed peers under one manager. Blank ranks have no pink shading.</a:t>
             </a:r>
             <a:endParaRPr lang="en-US" sz="2000" dirty="0"/>
           </a:p>
@@ -8104,7 +8104,7 @@
                 <a:ea typeface="Segoe UI" pitchFamily="34" charset="-122"/>
                 <a:cs typeface="Segoe UI" pitchFamily="34" charset="-120"/>
               </a:rPr>
-              <a:t>Combine it with job needs, cost and feedback. Individual ranks need Minimum Group Size 1.</a:t>
+              <a:t>1 = most active; ties share ranks. Totals aren't ranked. Minimum Group Size 1 is required.</a:t>
             </a:r>
             <a:endParaRPr lang="en-US" sz="1450" dirty="0"/>
           </a:p>
@@ -9550,7 +9550,7 @@
                 <a:ea typeface="Segoe UI Semibold" pitchFamily="34" charset="-122"/>
                 <a:cs typeface="Segoe UI Semibold" pitchFamily="34" charset="-120"/>
               </a:rPr>
-              <a:t>Categories are clues</a:t>
+              <a:t>Publishers aren't tenant creators</a:t>
             </a:r>
             <a:endParaRPr lang="en-US" sz="2100" dirty="0"/>
           </a:p>
@@ -9589,7 +9589,7 @@
                 <a:ea typeface="Segoe UI" pitchFamily="34" charset="-122"/>
                 <a:cs typeface="Segoe UI" pitchFamily="34" charset="-120"/>
               </a:rPr>
-              <a:t>Inferred activity and agent use cases come from activity records and agent descriptions. Check them with the people doing the work.</a:t>
+              <a:t>For store agents, Developer Name is the publisher, not a tenant creator. System and untracked entries aren't review targets.</a:t>
             </a:r>
             <a:endParaRPr lang="en-US" sz="1700" dirty="0"/>
           </a:p>
@@ -9698,7 +9698,7 @@
                 <a:ea typeface="Segoe UI" pitchFamily="34" charset="-122"/>
                 <a:cs typeface="Segoe UI" pitchFamily="34" charset="-120"/>
               </a:rPr>
-              <a:t>The report shows recorded activity. The team can tell us what it means for their work.</a:t>
+              <a:t>System agents are excluded by default; Security Copilot shows "Usage not tracked here".</a:t>
             </a:r>
             <a:endParaRPr lang="en-US" sz="1500" dirty="0"/>
           </a:p>
@@ -10526,7 +10526,7 @@
                 <a:ea typeface="Segoe UI" pitchFamily="34" charset="-122"/>
                 <a:cs typeface="Segoe UI" pitchFamily="34" charset="-120"/>
               </a:rPr>
-              <a:t>Any whole number. For example, 10 shows groups of ten or more.</a:t>
+              <a:t>Any whole number of 1 or more. For example, 10 shows groups of ten or more.</a:t>
             </a:r>
             <a:endParaRPr lang="en-US" sz="1700" dirty="0"/>
           </a:p>
@@ -15569,7 +15569,7 @@
                 <a:ea typeface="Segoe UI" pitchFamily="34" charset="-122"/>
                 <a:cs typeface="Segoe UI" pitchFamily="34" charset="-120"/>
               </a:rPr>
-              <a:t>Open Org filters. Pick a company, division, department or a manager's whole reporting team.</a:t>
+              <a:t>Open Org filters. Choose your team; Include system agents defaults to No.</a:t>
             </a:r>
             <a:endParaRPr lang="en-US" sz="1450" dirty="0"/>
           </a:p>
@@ -21090,7 +21090,7 @@
                 <a:ea typeface="Segoe UI" pitchFamily="34" charset="-122"/>
                 <a:cs typeface="Segoe UI" pitchFamily="34" charset="-120"/>
               </a:rPr>
-              <a:t>Users, Copilot sessions per user, the share who also used agents and agent sessions per user.</a:t>
+              <a:t>Users, Copilot sessions per user and agent comparisons. Agent prompt cells also need this licensed row to meet the minimum.</a:t>
             </a:r>
             <a:endParaRPr lang="en-US" sz="1500" dirty="0"/>
           </a:p>
@@ -21273,7 +21273,7 @@
                 <a:ea typeface="Segoe UI" pitchFamily="34" charset="-122"/>
                 <a:cs typeface="Segoe UI" pitchFamily="34" charset="-120"/>
               </a:rPr>
-              <a:t>Chat users, sessions per user and the share who also used agents.</a:t>
+              <a:t>Chat and agent use; agent prompt cells need this row's minimum.</a:t>
             </a:r>
             <a:endParaRPr lang="en-US" sz="1500" dirty="0"/>
           </a:p>
@@ -22915,7 +22915,7 @@
                 <a:ea typeface="Segoe UI" pitchFamily="34" charset="-122"/>
                 <a:cs typeface="Segoe UI" pitchFamily="34" charset="-120"/>
               </a:rPr>
-              <a:t>The cards and bars describe that month. The tables beside them cover your whole selected period, so their totals won't match. "Daily" names the 16+ group; it doesn't mean every day.</a:t>
+              <a:t>The cards and bars describe that month. Tables cover your whole selected period, so their totals may differ. "Daily" names the 16+ group; it doesn’t mean every day.</a:t>
             </a:r>
             <a:endParaRPr lang="en-US" sz="1500" dirty="0"/>
           </a:p>
@@ -24762,7 +24762,7 @@
                 <a:ea typeface="Segoe UI" pitchFamily="34" charset="-122"/>
                 <a:cs typeface="Segoe UI" pitchFamily="34" charset="-120"/>
               </a:rPr>
-              <a:t>Top 5 apps by Copilot sessions, such as Copilot Chat, Outlook, Teams and Word.</a:t>
+              <a:t>Friendly product names, including M365 Copilot Chat. Hover for raw app values.</a:t>
             </a:r>
             <a:endParaRPr lang="en-US" sz="1500" dirty="0"/>
           </a:p>

--- a/AI-in-One-v2.0.0-Storyboard.pptx
+++ b/AI-in-One-v2.0.0-Storyboard.pptx
@@ -608,6 +608,11 @@
 The filters on the right let you focus by return rate, review status, agent type, agent name and recency.</a:t>
             </a:r>
           </a:p>
+          <a:p>
+            <a:r>
+              <a:t>Use Cases: eligible agents need at least MAX(Minimum Group Size, 5) users in scope. Each component is the share of other eligible agents with a lower return rate, sessions per user or prompts per session. Average the three equally; ties share percentiles and a sole eligible agent scores 100%. Break score ties by sessions descending, then agent name ascending. The tooltip retains users, sessions, prompts and prompts/session. Engagement is not measured business value.</a:t>
+            </a:r>
+          </a:p>
         </p:txBody>
       </p:sp>
       <p:sp>
@@ -698,6 +703,11 @@
 Before improving, sharing or retiring an agent, ask its owner what it's for and what its users think.</a:t>
             </a:r>
           </a:p>
+          <a:p>
+            <a:r>
+              <a:t>Creator filtering includes matching no-usage catalog rows via metadata, not by disclosing protected activity. Dormant means previously used, last recorded activity over 60 days before the selected end date; No usage/Never Used is distinct. Existing review thresholds are rules of thumb, not validated business benchmarks.</a:t>
+            </a:r>
+          </a:p>
         </p:txBody>
       </p:sp>
       <p:sp>
@@ -789,6 +799,11 @@
 The agent's listed capabilities describe what it can do, not proof that every feature was used.</a:t>
             </a:r>
           </a:p>
+          <a:p>
+            <a:r>
+              <a:t>Most used agent uses sessions in the current row and breaks ties by agent name; Agents used counts distinct agents in that scope. Disclosure and Minimum Group Size remain. The original Leaderboard action is drillthrough; the constrained selector is intentional. Its note and Open Agent Details button navigate to the full list. Right-click drillthrough and Clear filters are unchanged.</a:t>
+            </a:r>
+          </a:p>
         </p:txBody>
       </p:sp>
       <p:sp>
@@ -880,6 +895,11 @@
 Use the page to identify a licensing conversation worth having. Bring in role, need, cost and colleague feedback. Individual rankings appear only when Minimum Group Size 1 has been approved.</a:t>
             </a:r>
           </a:p>
+          <a:p>
+            <a:r>
+              <a:t>The unchanged score is 60% sessions per week divided by 10, 30% active days per week divided by 5, and 10% sessions per active day divided by 5. Scores are not capped. The chart's weekly metric selector changes the vertical units, selected-scope median and scale together. Licensed directory headcount is separate from active/inactive usage.</a:t>
+            </a:r>
+          </a:p>
         </p:txBody>
       </p:sp>
       <p:sp>
@@ -1063,6 +1083,11 @@
 Row-level security decides whose data each viewer sees. Reporting hierarchy: viewers see themselves and everyone who reports to them, matched by sign-in name. All data viewers: everyone. Until people or groups are assigned to a role in the Power BI service, viewers can't see the report's data.</a:t>
             </a:r>
           </a:p>
+          <a:p>
+            <a:r>
+              <a:t>When Manager_UserKey exists in the original PAX source, blank is authoritative top of chain, without ManagerUPN fallback. Unresolved managers become roots. Legacy files still resolve by UPN, except an out-of-file manager no longer collapses descendants. Only the affected person's diagnostic is retained, for Hierarchy Message and Department Hierarchy Depth. Access permissions are unchanged.</a:t>
+            </a:r>
+          </a:p>
         </p:txBody>
       </p:sp>
       <p:sp>
@@ -1517,6 +1542,11 @@
 3. One person can use several experiences, so these bars are not parts of one total.
 4. The agent table lists every agent the selected people used. Right-click a name and choose Drill through, then Agent drillthrough, for that agent's details with the same team and dates.
 Tip: Org filters, then Reporting team, lets you search for any manager by name.</a:t>
+            </a:r>
+          </a:p>
+          <a:p>
+            <a:r>
+              <a:t>Explorer's Jul, Aug and Sep month-start dots are on the bold 7-day trends. Daily values, trend calculations, legend and tooltips are unchanged. Activity by experience switches sessions/prompts. Insufficient inference is explicitly labeled. Headline help and prompt-count footers explain context and coverage.</a:t>
             </a:r>
           </a:p>
         </p:txBody>
@@ -3287,8 +3317,8 @@
         </p:nvSpPr>
         <p:spPr>
           <a:xfrm>
-            <a:off x="968715" y="6572549"/>
-            <a:ext cx="5817096" cy="1974698"/>
+            <a:off x="1126808" y="6527482"/>
+            <a:ext cx="7780972" cy="1848422"/>
           </a:xfrm>
           <a:prstGeom prst="roundRect">
             <a:avLst>
@@ -3318,7 +3348,7 @@
         </p:nvSpPr>
         <p:spPr>
           <a:xfrm>
-            <a:off x="767547" y="6389669"/>
+            <a:off x="772192" y="6362890"/>
             <a:ext cx="329184" cy="329184"/>
           </a:xfrm>
           <a:prstGeom prst="ellipse">
@@ -3350,7 +3380,7 @@
         </p:nvSpPr>
         <p:spPr>
           <a:xfrm>
-            <a:off x="767547" y="6398813"/>
+            <a:off x="772192" y="6362890"/>
             <a:ext cx="329184" cy="329184"/>
           </a:xfrm>
           <a:prstGeom prst="rect">
@@ -3558,7 +3588,7 @@
                 <a:ea typeface="Segoe UI" pitchFamily="34" charset="-122"/>
                 <a:cs typeface="Segoe UI" pitchFamily="34" charset="-120"/>
               </a:rPr>
-              <a:t>Which agent reaches the most people and the most organizations. Ties are shown.</a:t>
+              <a:t>Most users and organizations show ties. Top builder remains stable when one agent is selected.</a:t>
             </a:r>
             <a:endParaRPr lang="en-US" sz="1500" dirty="0"/>
           </a:p>
@@ -4068,7 +4098,7 @@
                 <a:ea typeface="Segoe UI Semibold" pitchFamily="34" charset="-122"/>
                 <a:cs typeface="Segoe UI Semibold" pitchFamily="34" charset="-120"/>
               </a:rPr>
-              <a:t>Top 5 agents by sessions</a:t>
+              <a:t>Weekly usage rank and Top 5</a:t>
             </a:r>
             <a:endParaRPr lang="en-US" sz="1900" dirty="0"/>
           </a:p>
@@ -4107,7 +4137,7 @@
                 <a:ea typeface="Segoe UI" pitchFamily="34" charset="-122"/>
                 <a:cs typeface="Segoe UI" pitchFamily="34" charset="-120"/>
               </a:rPr>
-              <a:t>Select an agent to filter the page and read its description.</a:t>
+              <a:t>Weekly prompts/sessions; hover Top 5 for type and description.</a:t>
             </a:r>
             <a:endParaRPr lang="en-US" sz="1500" dirty="0"/>
           </a:p>
@@ -4216,7 +4246,7 @@
                 <a:ea typeface="Segoe UI" pitchFamily="34" charset="-122"/>
                 <a:cs typeface="Segoe UI" pitchFamily="34" charset="-120"/>
               </a:rPr>
-              <a:t>Agents are reaching more people, and most people who try one come back.</a:t>
+              <a:t>Use Cases now ranks eligible agents by repeat use and conversation depth, not session volume alone. Read the score as a conversation starter.</a:t>
             </a:r>
             <a:endParaRPr lang="en-US" sz="1500" dirty="0"/>
           </a:p>
@@ -5312,7 +5342,7 @@
                 <a:ea typeface="Segoe UI" pitchFamily="34" charset="-122"/>
                 <a:cs typeface="Segoe UI" pitchFamily="34" charset="-120"/>
               </a:rPr>
-              <a:t>No recorded activity for your team and dates.</a:t>
+              <a:t>No usage is not Dormant. Dormant requires previous use more than 60 days before the selected end date.</a:t>
             </a:r>
             <a:endParaRPr lang="en-US" sz="1450" dirty="0"/>
           </a:p>
@@ -5489,7 +5519,7 @@
                 <a:ea typeface="Segoe UI" pitchFamily="34" charset="-122"/>
                 <a:cs typeface="Segoe UI" pitchFamily="34" charset="-120"/>
               </a:rPr>
-              <a:t>Catalog status tells us how an agent matched; its platform tells us where it was built.</a:t>
+              <a:t>The Creator filter includes matching catalog agents with no usage, while numeric activity keeps its disclosure rules.</a:t>
             </a:r>
             <a:endParaRPr lang="en-US" sz="1500" dirty="0"/>
           </a:p>
@@ -5839,8 +5869,8 @@
         </p:nvSpPr>
         <p:spPr>
           <a:xfrm>
-            <a:off x="968715" y="4381869"/>
-            <a:ext cx="9753448" cy="647948"/>
+            <a:off x="1006792" y="4340904"/>
+            <a:ext cx="9501188" cy="535324"/>
           </a:xfrm>
           <a:prstGeom prst="roundRect">
             <a:avLst>
@@ -5870,7 +5900,7 @@
         </p:nvSpPr>
         <p:spPr>
           <a:xfrm>
-            <a:off x="767547" y="4198989"/>
+            <a:off x="772192" y="4176312"/>
             <a:ext cx="329184" cy="329184"/>
           </a:xfrm>
           <a:prstGeom prst="ellipse">
@@ -5902,7 +5932,7 @@
         </p:nvSpPr>
         <p:spPr>
           <a:xfrm>
-            <a:off x="767547" y="4208133"/>
+            <a:off x="772192" y="4176312"/>
             <a:ext cx="329184" cy="329184"/>
           </a:xfrm>
           <a:prstGeom prst="rect">
@@ -5941,8 +5971,8 @@
         </p:nvSpPr>
         <p:spPr>
           <a:xfrm>
-            <a:off x="968715" y="5060671"/>
-            <a:ext cx="5952104" cy="1481024"/>
+            <a:off x="1006792" y="4913147"/>
+            <a:ext cx="5700712" cy="1439837"/>
           </a:xfrm>
           <a:prstGeom prst="roundRect">
             <a:avLst>
@@ -5972,7 +6002,7 @@
         </p:nvSpPr>
         <p:spPr>
           <a:xfrm>
-            <a:off x="767547" y="4877791"/>
+            <a:off x="772192" y="4748555"/>
             <a:ext cx="329184" cy="329184"/>
           </a:xfrm>
           <a:prstGeom prst="ellipse">
@@ -6004,7 +6034,7 @@
         </p:nvSpPr>
         <p:spPr>
           <a:xfrm>
-            <a:off x="767547" y="4886935"/>
+            <a:off x="772192" y="4748555"/>
             <a:ext cx="329184" cy="329184"/>
           </a:xfrm>
           <a:prstGeom prst="rect">
@@ -6043,8 +6073,8 @@
         </p:nvSpPr>
         <p:spPr>
           <a:xfrm>
-            <a:off x="6970837" y="5060671"/>
-            <a:ext cx="3751326" cy="3208884"/>
+            <a:off x="6767512" y="4913147"/>
+            <a:ext cx="3740468" cy="3285782"/>
           </a:xfrm>
           <a:prstGeom prst="roundRect">
             <a:avLst>
@@ -6074,7 +6104,7 @@
         </p:nvSpPr>
         <p:spPr>
           <a:xfrm>
-            <a:off x="6769669" y="4877791"/>
+            <a:off x="6602920" y="4637799"/>
             <a:ext cx="329184" cy="329184"/>
           </a:xfrm>
           <a:prstGeom prst="ellipse">
@@ -6106,7 +6136,7 @@
         </p:nvSpPr>
         <p:spPr>
           <a:xfrm>
-            <a:off x="6769669" y="4886935"/>
+            <a:off x="6602920" y="4637799"/>
             <a:ext cx="329184" cy="329184"/>
           </a:xfrm>
           <a:prstGeom prst="rect">
@@ -6863,7 +6893,7 @@
                 <a:ea typeface="Segoe UI" pitchFamily="34" charset="-122"/>
                 <a:cs typeface="Segoe UI" pitchFamily="34" charset="-120"/>
               </a:rPr>
-              <a:t>Open the Agent Details tab and pick from all agents, or right-click an agent name and choose Drill through &gt; Agent drillthrough.</a:t>
+              <a:t>The tab browses all agents. Leaderboard or right-click drillthrough keeps the clicked agent; its note and Open Agent Details button lead to the full list.</a:t>
             </a:r>
             <a:endParaRPr lang="en-US" sz="1500" dirty="0"/>
           </a:p>
@@ -6972,7 +7002,7 @@
                 <a:ea typeface="Segoe UI" pitchFamily="34" charset="-122"/>
                 <a:cs typeface="Segoe UI" pitchFamily="34" charset="-120"/>
               </a:rPr>
-              <a:t>Let's look at one agent closely: who uses it, how often, and in which teams.</a:t>
+              <a:t>The Leaderboard also shows Most used agent and Agents used for each row's scope. Follow an agent into Details to explore who uses it.</a:t>
             </a:r>
             <a:endParaRPr lang="en-US" sz="1500" dirty="0"/>
           </a:p>
@@ -7765,7 +7795,7 @@
                 <a:ea typeface="Segoe UI Semibold" pitchFamily="34" charset="-122"/>
                 <a:cs typeface="Segoe UI Semibold" pitchFamily="34" charset="-120"/>
               </a:rPr>
-              <a:t>Weekly sessions</a:t>
+              <a:t>Weekly sessions / 10</a:t>
             </a:r>
             <a:endParaRPr lang="en-US" sz="1800" dirty="0"/>
           </a:p>
@@ -7843,7 +7873,7 @@
                 <a:ea typeface="Segoe UI Semibold" pitchFamily="34" charset="-122"/>
                 <a:cs typeface="Segoe UI Semibold" pitchFamily="34" charset="-120"/>
               </a:rPr>
-              <a:t>Weekly active days</a:t>
+              <a:t>Weekly active days / 5</a:t>
             </a:r>
             <a:endParaRPr lang="en-US" sz="1800" dirty="0"/>
           </a:p>
@@ -7921,7 +7951,7 @@
                 <a:ea typeface="Segoe UI Semibold" pitchFamily="34" charset="-122"/>
                 <a:cs typeface="Segoe UI Semibold" pitchFamily="34" charset="-120"/>
               </a:rPr>
-              <a:t>Sessions per active day</a:t>
+              <a:t>Sessions per active day / 5</a:t>
             </a:r>
             <a:endParaRPr lang="en-US" sz="1800" dirty="0"/>
           </a:p>
@@ -8213,7 +8243,7 @@
                 <a:ea typeface="Segoe UI" pitchFamily="34" charset="-122"/>
                 <a:cs typeface="Segoe UI" pitchFamily="34" charset="-120"/>
               </a:rPr>
-              <a:t>These teams use Copilot Chat often and regularly. Let's ask whether a license would help their work.</a:t>
+              <a:t>Switch median weekly sessions or prompts; the median and scale follow the metric. The score is a heuristic, not a licensing decision.</a:t>
             </a:r>
             <a:endParaRPr lang="en-US" sz="1500" dirty="0"/>
           </a:p>
@@ -9040,7 +9070,7 @@
                 <a:ea typeface="Segoe UI" pitchFamily="34" charset="-122"/>
                 <a:cs typeface="Segoe UI" pitchFamily="34" charset="-120"/>
               </a:rPr>
-              <a:t>Prompts count requests and sessions count conversations. Neither measures time saved, quality or return on investment.</a:t>
+              <a:t>Prompts are requests; sessions are conversations. Neither proves value. Headline help and coverage links explain context.</a:t>
             </a:r>
             <a:endParaRPr lang="en-US" sz="1700" dirty="0"/>
           </a:p>
@@ -10745,7 +10775,7 @@
                 <a:ea typeface="Segoe UI" pitchFamily="34" charset="-122"/>
                 <a:cs typeface="Segoe UI" pitchFamily="34" charset="-120"/>
               </a:rPr>
-              <a:t>Managers see themselves and everyone who reports to them, directly or indirectly.</a:t>
+              <a:t>Managers see themselves and descendants. Blank PAX manager keys or out-of-file managers form roots, not collapsed branches.</a:t>
             </a:r>
             <a:endParaRPr lang="en-US" sz="1700" dirty="0"/>
           </a:p>
@@ -10891,7 +10921,7 @@
                 <a:ea typeface="Segoe UI Semibold" pitchFamily="34" charset="-122"/>
                 <a:cs typeface="Segoe UI Semibold" pitchFamily="34" charset="-120"/>
               </a:rPr>
-              <a:t>Viewers see no data until they're assigned a role.</a:t>
+              <a:t>Unassigned viewers see nothing. Any unresolved-manager diagnostic belongs only to the affected person, not their descendants.</a:t>
             </a:r>
             <a:endParaRPr lang="en-US" sz="1700" dirty="0"/>
           </a:p>
@@ -13795,7 +13825,7 @@
                 <a:ea typeface="Segoe UI" pitchFamily="34" charset="-122"/>
                 <a:cs typeface="Segoe UI" pitchFamily="34" charset="-120"/>
               </a:rPr>
-              <a:t>Every screenshot uses made-up example data. Use the live report for your organization's results. Get the dashboard at </a:t>
+              <a:t>Synthetic screenshots use Minimum Group Size 1 for optional detail; templates default to 3. Real individual views require approval. Get the report at aka.ms/AI-in-One.</a:t>
             </a:r>
             <a:r>
               <a:rPr lang="en-US" sz="1300" u="sng" dirty="0">
@@ -13813,7 +13843,7 @@
                   </a:extLst>
                 </a:hlinkClick>
               </a:rPr>
-              <a:t>aka.ms/AI-in-One</a:t>
+              <a:t/>
             </a:r>
             <a:r>
               <a:rPr lang="en-US" sz="1300" dirty="0">
@@ -13824,7 +13854,7 @@
                 <a:ea typeface="Segoe UI" pitchFamily="34" charset="-122"/>
                 <a:cs typeface="Segoe UI" pitchFamily="34" charset="-120"/>
               </a:rPr>
-              <a:t>.</a:t>
+              <a:t/>
             </a:r>
             <a:endParaRPr lang="en-US" sz="1300" dirty="0"/>
           </a:p>
@@ -14700,7 +14730,7 @@
                 <a:ea typeface="Segoe UI" pitchFamily="34" charset="-122"/>
                 <a:cs typeface="Segoe UI" pitchFamily="34" charset="-120"/>
               </a:rPr>
-              <a:t>Chat (Web): Usage Trends</a:t>
+              <a:t>Copilot Chat (Unlicensed): Usage Trends</a:t>
             </a:r>
             <a:endParaRPr lang="en-US" sz="1800" dirty="0"/>
           </a:p>
@@ -18022,7 +18052,7 @@
                 <a:ea typeface="Segoe UI" pitchFamily="34" charset="-122"/>
                 <a:cs typeface="Segoe UI" pitchFamily="34" charset="-120"/>
               </a:rPr>
-              <a:t>Thin lines show each day. Bold lines show the 7-day average, so the pattern is easy to follow.</a:t>
+              <a:t>Thin daily lines show detail. Bold 7-day trends show the pattern; matching dots mark month starts on those trends.</a:t>
             </a:r>
             <a:endParaRPr lang="en-US" sz="1500" dirty="0"/>
           </a:p>
@@ -18205,7 +18235,7 @@
                 <a:ea typeface="Segoe UI" pitchFamily="34" charset="-122"/>
                 <a:cs typeface="Segoe UI" pitchFamily="34" charset="-120"/>
               </a:rPr>
-              <a:t>Sessions by experience: M365 Copilot, agents, Copilot Chat, other AI, unclassified activity and Cowork.</a:t>
+              <a:t>Switch sessions or prompts for M365 Copilot, agents, Copilot Chat, other AI, unclassified activity and Cowork.</a:t>
             </a:r>
             <a:endParaRPr lang="en-US" sz="1500" dirty="0"/>
           </a:p>
@@ -18847,8 +18877,8 @@
         </p:nvSpPr>
         <p:spPr>
           <a:xfrm>
-            <a:off x="968715" y="3980758"/>
-            <a:ext cx="800283" cy="2109978"/>
+            <a:off x="1126808" y="4058984"/>
+            <a:ext cx="1500188" cy="2066925"/>
           </a:xfrm>
           <a:prstGeom prst="roundRect">
             <a:avLst>
@@ -18878,7 +18908,7 @@
         </p:nvSpPr>
         <p:spPr>
           <a:xfrm>
-            <a:off x="767547" y="3797878"/>
+            <a:off x="772192" y="3894392"/>
             <a:ext cx="329184" cy="329184"/>
           </a:xfrm>
           <a:prstGeom prst="ellipse">
@@ -18910,7 +18940,7 @@
         </p:nvSpPr>
         <p:spPr>
           <a:xfrm>
-            <a:off x="767547" y="3807022"/>
+            <a:off x="772192" y="3894392"/>
             <a:ext cx="329184" cy="329184"/>
           </a:xfrm>
           <a:prstGeom prst="rect">
@@ -18949,8 +18979,8 @@
         </p:nvSpPr>
         <p:spPr>
           <a:xfrm>
-            <a:off x="1819016" y="3980758"/>
-            <a:ext cx="7302581" cy="2109978"/>
+            <a:off x="2677001" y="4058984"/>
+            <a:ext cx="6240780" cy="2066925"/>
           </a:xfrm>
           <a:prstGeom prst="roundRect">
             <a:avLst>
@@ -18980,7 +19010,7 @@
         </p:nvSpPr>
         <p:spPr>
           <a:xfrm>
-            <a:off x="1617848" y="3797878"/>
+            <a:off x="2512409" y="3799904"/>
             <a:ext cx="329184" cy="329184"/>
           </a:xfrm>
           <a:prstGeom prst="ellipse">
@@ -19012,7 +19042,7 @@
         </p:nvSpPr>
         <p:spPr>
           <a:xfrm>
-            <a:off x="1617848" y="3807022"/>
+            <a:off x="2512409" y="3799904"/>
             <a:ext cx="329184" cy="329184"/>
           </a:xfrm>
           <a:prstGeom prst="rect">
@@ -19424,7 +19454,7 @@
                 <a:ea typeface="Segoe UI" pitchFamily="34" charset="-122"/>
                 <a:cs typeface="Segoe UI" pitchFamily="34" charset="-120"/>
               </a:rPr>
-              <a:t>Agent users, chat users, and active or inactive licensed users across all recorded experiences.</a:t>
+              <a:t>Agent users, Unlicensed Chat Users, active and inactive licensed users, plus licensed directory headcount.</a:t>
             </a:r>
             <a:endParaRPr lang="en-US" sz="1500" dirty="0"/>
           </a:p>
@@ -20907,7 +20937,7 @@
                 <a:ea typeface="Segoe UI" pitchFamily="34" charset="-122"/>
                 <a:cs typeface="Segoe UI" pitchFamily="34" charset="-120"/>
               </a:rPr>
-              <a:t>Users, prompts, prompts per session and weekly prompt/session comparisons for agents, chat and licensed Copilot.</a:t>
+              <a:t>Group dividers and per-user labels separate the populations. Prompts share Sessions-style table colors.</a:t>
             </a:r>
             <a:endParaRPr lang="en-US" sz="1500" dirty="0"/>
           </a:p>
@@ -25149,7 +25179,7 @@
                 <a:ea typeface="Segoe UI" pitchFamily="34" charset="-122"/>
                 <a:cs typeface="Segoe UI" pitchFamily="34" charset="-120"/>
               </a:rPr>
-              <a:t>These pages are named Chat (Web) in the report.</a:t>
+              <a:t>The three report tabs are explicitly named Copilot Chat (Unlicensed).</a:t>
             </a:r>
             <a:endParaRPr lang="en-US" sz="2000" dirty="0"/>
           </a:p>

--- a/AI-in-One-v2.0.0-Storyboard.pptx
+++ b/AI-in-One-v2.0.0-Storyboard.pptx
@@ -25,6 +25,8 @@
     <p:sldId id="270" r:id="rId16"/>
     <p:sldId id="271" r:id="rId17"/>
     <p:sldId id="272" r:id="rId18"/>
+    <p:sldId id="274" r:id="rId26"/>
+    <p:sldId id="275" r:id="rId27"/>
   </p:sldIdLst>
   <p:sldSz cx="18288000" cy="10287000"/>
   <p:notesSz cx="10287000" cy="18288000"/>
@@ -900,6 +902,11 @@
               <a:t>The unchanged score is 60% sessions per week divided by 10, 30% active days per week divided by 5, and 10% sessions per active day divided by 5. Scores are not capped. The chart's weekly metric selector changes the vertical units, selected-scope median and scale together. Licensed directory headcount is separate from active/inactive usage.</a:t>
             </a:r>
           </a:p>
+          <a:p>
+            <a:r>
+              <a:t>Sessions is the default; Prompts substitutes volume units in the same 10/5/5 benchmarks and 60/30/10 weights. Departments and protected person search support the conversation.</a:t>
+            </a:r>
+          </a:p>
         </p:txBody>
       </p:sp>
       <p:sp>
@@ -994,6 +1001,11 @@
 The Metric Glossary &amp; Guide page in the report has a definition for every number.</a:t>
             </a:r>
           </a:p>
+          <a:p>
+            <a:r>
+              <a:t>History Off is a current snapshot. With observed history, First seen is the PAX observation date, not assignment time. Before/after activity does not establish causation; fixed habit bands and the prompt-only response limitation remain.</a:t>
+            </a:r>
+          </a:p>
         </p:txBody>
       </p:sp>
       <p:sp>
@@ -1303,6 +1315,80 @@
 </p:notes>
 </file>
 
+<file path=ppt/notesSlides/notesSlide19.xml><?xml version="1.0" encoding="utf-8"?>
+<p:notes xmlns:a="http://schemas.openxmlformats.org/drawingml/2006/main" xmlns:p="http://schemas.openxmlformats.org/presentationml/2006/main" xmlns:r="http://schemas.openxmlformats.org/officeDocument/2006/relationships">
+  <p:cSld>
+    <p:spTree>
+      <p:nvGrpSpPr>
+        <p:cNvPr id="1" name=""/>
+        <p:cNvGrpSpPr/>
+        <p:nvPr/>
+      </p:nvGrpSpPr>
+      <p:grpSpPr>
+        <a:xfrm>
+          <a:off x="0" y="0"/>
+          <a:ext cx="0" cy="0"/>
+          <a:chOff x="0" y="0"/>
+          <a:chExt cx="0" cy="0"/>
+        </a:xfrm>
+      </p:grpSpPr>
+      <p:sp>
+        <p:nvSpPr>
+          <p:cNvPr id="2" name="Product notes"/>
+          <p:cNvSpPr/>
+          <p:nvPr>
+            <p:ph type="body" idx="1"/>
+          </p:nvPr>
+        </p:nvSpPr>
+        <p:spPr/>
+        <p:txBody>
+          <a:bodyPr/>
+          <a:lstStyle/>
+          <a:p>
+            <a:r>
+              <a:t>Prioritization and monthly comparisons</a:t>
+            </a:r>
+          </a:p>
+          <a:p/>
+          <a:p>
+            <a:r>
+              <a:t>Choose a prioritization view: Paid/free counts, independent activity choices, Departments and protected person search work together. Clear filters resets the selections.</a:t>
+            </a:r>
+          </a:p>
+          <a:p/>
+          <a:p>
+            <a:r>
+              <a:t>Choose Sessions or Prompts: Sessions is the default. Prompts uses the same 10/5/5 benchmarks and 60/30/10 weights in prompt units. The score is uncapped and is not a percentage.</a:t>
+            </a:r>
+          </a:p>
+          <a:p/>
+          <a:p>
+            <a:r>
+              <a:t>Compare months: Monthly comparison shows totals, distinct active people and per-active-person ratios for each cohort. Weekly-only rank controls do not change monthly totals.</a:t>
+            </a:r>
+          </a:p>
+          <a:p/>
+          <a:p>
+            <a:r>
+              <a:t>Allow overlap: With observed history, a person may belong to paid and free populations in one period. Distinct totals can be smaller than their sum.</a:t>
+            </a:r>
+          </a:p>
+          <a:p/>
+          <a:p>
+            <a:r>
+              <a:t>First seen is an observation, not assignment time. Follow existing access rules.</a:t>
+            </a:r>
+          </a:p>
+        </p:txBody>
+      </p:sp>
+    </p:spTree>
+  </p:cSld>
+  <p:clrMapOvr>
+    <a:masterClrMapping/>
+  </p:clrMapOvr>
+</p:notes>
+</file>
+
 <file path=ppt/notesSlides/notesSlide2.xml><?xml version="1.0" encoding="utf-8"?>
 <p:notes xmlns:a="http://schemas.openxmlformats.org/drawingml/2006/main" xmlns:r="http://schemas.openxmlformats.org/officeDocument/2006/relationships" xmlns:p="http://schemas.openxmlformats.org/presentationml/2006/main">
   <p:cSld>
@@ -1390,6 +1476,92 @@
         <p14:creationId xmlns:p14="http://schemas.microsoft.com/office/powerpoint/2010/main" val="1024086991"/>
       </p:ext>
     </p:extLst>
+  </p:cSld>
+  <p:clrMapOvr>
+    <a:masterClrMapping/>
+  </p:clrMapOvr>
+</p:notes>
+</file>
+
+<file path=ppt/notesSlides/notesSlide20.xml><?xml version="1.0" encoding="utf-8"?>
+<p:notes xmlns:a="http://schemas.openxmlformats.org/drawingml/2006/main" xmlns:p="http://schemas.openxmlformats.org/presentationml/2006/main" xmlns:r="http://schemas.openxmlformats.org/officeDocument/2006/relationships">
+  <p:cSld>
+    <p:spTree>
+      <p:nvGrpSpPr>
+        <p:cNvPr id="1" name=""/>
+        <p:cNvGrpSpPr/>
+        <p:nvPr/>
+      </p:nvGrpSpPr>
+      <p:grpSpPr>
+        <a:xfrm>
+          <a:off x="0" y="0"/>
+          <a:ext cx="0" cy="0"/>
+          <a:chOff x="0" y="0"/>
+          <a:chExt cx="0" cy="0"/>
+        </a:xfrm>
+      </p:grpSpPr>
+      <p:sp>
+        <p:nvSpPr>
+          <p:cNvPr id="2" name="Product notes"/>
+          <p:cNvSpPr/>
+          <p:nvPr>
+            <p:ph type="body" idx="1"/>
+          </p:nvPr>
+        </p:nvSpPr>
+        <p:spPr/>
+        <p:txBody>
+          <a:bodyPr/>
+          <a:lstStyle/>
+          <a:p>
+            <a:r>
+              <a:t>Read observed history responsibly</a:t>
+            </a:r>
+          </a:p>
+          <a:p/>
+          <a:p>
+            <a:r>
+              <a:t>Observation is not assignment: First seen is recorded by a PAX run. Changes before collection or between observations may not be known. Unknown stays Unknown.</a:t>
+            </a:r>
+          </a:p>
+          <a:p/>
+          <a:p>
+            <a:r>
+              <a:t>Population and activity differ: History can attribute events to recorded as-of states. Monthly paid membership means licensed at any point in that month; paid/free populations can overlap.</a:t>
+            </a:r>
+          </a:p>
+          <a:p/>
+          <a:p>
+            <a:r>
+              <a:t>Keep existing definitions: Habit bands stay 1–5, 6–10, 11–15 and 16+ active days in the displayed month. Prompt-only messages do not support a responses-per-prompt metric.</a:t>
+            </a:r>
+          </a:p>
+          <a:p/>
+          <a:p>
+            <a:r>
+              <a:t>Use patterns, not claimed outcomes: Stored behavior labels use resource/action/context/plugin/app-host evidence and sometimes agent-name keywords. Leading patterns use agent sessions with alphabetical ties; no prompt-text AI inference is implied.</a:t>
+            </a:r>
+          </a:p>
+          <a:p/>
+          <a:p>
+            <a:r>
+              <a:t>Recognize the example: The unchanged sample has 7,973 agent users: 5,829 paid + 2,144 free with no overlap. That sample fact is not a universal rule for observed history.</a:t>
+            </a:r>
+          </a:p>
+          <a:p/>
+          <a:p>
+            <a:r>
+              <a:t>Fabric keeps both source choices explicit: Default Graph collectors remain current snapshots. Paired processed-PAX CSV inputs preserve already-exported states, dates and event attribution; preparation validates the publication contract.</a:t>
+            </a:r>
+          </a:p>
+          <a:p/>
+          <a:p>
+            <a:r>
+              <a:t>First seen is an observation, not assignment time. Follow existing access rules.</a:t>
+            </a:r>
+          </a:p>
+        </p:txBody>
+      </p:sp>
+    </p:spTree>
   </p:cSld>
   <p:clrMapOvr>
     <a:masterClrMapping/>
@@ -1637,6 +1809,11 @@
 The key message: one person can appear in several groups. Don't add the user counts together and don't assume people moved from one experience to another.
 Weekly sessions per user is each active user's sessions divided by the weeks they were active, then averaged. It is not divided by every calendar week.
 Inactive licensed users are licensed people with no recorded activity across any experience in the selected dates; agent-only users are active. That alone doesn't prove a license has no value; it's a reason to ask what would help.</a:t>
+            </a:r>
+          </a:p>
+          <a:p>
+            <a:r>
+              <a:t>Monthly comparison shows totals, distinct active people and per-active-person ratios. Observed-history paid/free populations may overlap; count distinct people once.</a:t>
             </a:r>
           </a:p>
         </p:txBody>
@@ -2781,7 +2958,7 @@
                 <a:ea typeface="Segoe UI" pitchFamily="34" charset="-122"/>
                 <a:cs typeface="Segoe UI" pitchFamily="34" charset="-120"/>
               </a:rPr>
-              <a:t>10 / 17</a:t>
+              <a:t>10 / 19</a:t>
             </a:r>
             <a:endParaRPr lang="en-US" sz="1100" dirty="0"/>
           </a:p>
@@ -4366,7 +4543,7 @@
                 <a:ea typeface="Segoe UI" pitchFamily="34" charset="-122"/>
                 <a:cs typeface="Segoe UI" pitchFamily="34" charset="-120"/>
               </a:rPr>
-              <a:t>11 / 17</a:t>
+              <a:t>11 / 19</a:t>
             </a:r>
             <a:endParaRPr lang="en-US" sz="1100" dirty="0"/>
           </a:p>
@@ -5639,7 +5816,7 @@
                 <a:ea typeface="Segoe UI" pitchFamily="34" charset="-122"/>
                 <a:cs typeface="Segoe UI" pitchFamily="34" charset="-120"/>
               </a:rPr>
-              <a:t>12 / 17</a:t>
+              <a:t>12 / 19</a:t>
             </a:r>
             <a:endParaRPr lang="en-US" sz="1100" dirty="0"/>
           </a:p>
@@ -7122,7 +7299,7 @@
                 <a:ea typeface="Segoe UI" pitchFamily="34" charset="-122"/>
                 <a:cs typeface="Segoe UI" pitchFamily="34" charset="-120"/>
               </a:rPr>
-              <a:t>13 / 17</a:t>
+              <a:t>13 / 19</a:t>
             </a:r>
             <a:endParaRPr lang="en-US" sz="1100" dirty="0"/>
           </a:p>
@@ -7280,7 +7457,7 @@
                 <a:ea typeface="Segoe UI" pitchFamily="34" charset="-122"/>
                 <a:cs typeface="Segoe UI" pitchFamily="34" charset="-120"/>
               </a:rPr>
-              <a:t>Rank compares unlicensed peers under one manager. Blank ranks have no pink shading.</a:t>
+              <a:t>Compare Departments or People &amp; chart; individual ranks remain employee-only with blank manager shading.</a:t>
             </a:r>
             <a:endParaRPr lang="en-US" sz="2000" dirty="0"/>
           </a:p>
@@ -7795,7 +7972,7 @@
                 <a:ea typeface="Segoe UI Semibold" pitchFamily="34" charset="-122"/>
                 <a:cs typeface="Segoe UI Semibold" pitchFamily="34" charset="-120"/>
               </a:rPr>
-              <a:t>Weekly sessions / 10</a:t>
+              <a:t>Weekly volume / 10</a:t>
             </a:r>
             <a:endParaRPr lang="en-US" sz="1800" dirty="0"/>
           </a:p>
@@ -7951,7 +8128,7 @@
                 <a:ea typeface="Segoe UI Semibold" pitchFamily="34" charset="-122"/>
                 <a:cs typeface="Segoe UI Semibold" pitchFamily="34" charset="-120"/>
               </a:rPr>
-              <a:t>Sessions per active day / 5</a:t>
+              <a:t>Volume per active day / 5</a:t>
             </a:r>
             <a:endParaRPr lang="en-US" sz="1800" dirty="0"/>
           </a:p>
@@ -8243,7 +8420,7 @@
                 <a:ea typeface="Segoe UI" pitchFamily="34" charset="-122"/>
                 <a:cs typeface="Segoe UI" pitchFamily="34" charset="-120"/>
               </a:rPr>
-              <a:t>Switch median weekly sessions or prompts; the median and scale follow the metric. The score is a heuristic, not a licensing decision.</a:t>
+              <a:t>Choose Sessions or Prompts. The same score benchmarks use the chosen volume units; it remains a heuristic.</a:t>
             </a:r>
             <a:endParaRPr lang="en-US" sz="1500" dirty="0"/>
           </a:p>
@@ -8363,7 +8540,7 @@
                 <a:ea typeface="Segoe UI" pitchFamily="34" charset="-122"/>
                 <a:cs typeface="Segoe UI" pitchFamily="34" charset="-120"/>
               </a:rPr>
-              <a:t>14 / 17</a:t>
+              <a:t>14 / 19</a:t>
             </a:r>
             <a:endParaRPr lang="en-US" sz="1100" dirty="0"/>
           </a:p>
@@ -9397,7 +9574,7 @@
                 <a:ea typeface="Segoe UI Semibold" pitchFamily="34" charset="-122"/>
                 <a:cs typeface="Segoe UI Semibold" pitchFamily="34" charset="-120"/>
               </a:rPr>
-              <a:t>License status is a snapshot</a:t>
+              <a:t>License history is observed</a:t>
             </a:r>
             <a:endParaRPr lang="en-US" sz="2100" dirty="0"/>
           </a:p>
@@ -9436,7 +9613,7 @@
                 <a:ea typeface="Segoe UI" pitchFamily="34" charset="-122"/>
                 <a:cs typeface="Segoe UI" pitchFamily="34" charset="-120"/>
               </a:rPr>
-              <a:t>It comes from the people file at collection time. Unknown is shown as Unknown, never as unlicensed.</a:t>
+              <a:t>History Off is a snapshot. With history, First seen is a collection observation, not assignment time.</a:t>
             </a:r>
             <a:endParaRPr lang="en-US" sz="1700" dirty="0"/>
           </a:p>
@@ -9848,7 +10025,7 @@
                 <a:ea typeface="Segoe UI" pitchFamily="34" charset="-122"/>
                 <a:cs typeface="Segoe UI" pitchFamily="34" charset="-120"/>
               </a:rPr>
-              <a:t>15 / 17</a:t>
+              <a:t>15 / 19</a:t>
             </a:r>
             <a:endParaRPr lang="en-US" sz="1100" dirty="0"/>
           </a:p>
@@ -11150,7 +11327,7 @@
                 <a:ea typeface="Segoe UI" pitchFamily="34" charset="-122"/>
                 <a:cs typeface="Segoe UI" pitchFamily="34" charset="-120"/>
               </a:rPr>
-              <a:t>16 / 17</a:t>
+              <a:t>16 / 19</a:t>
             </a:r>
             <a:endParaRPr lang="en-US" sz="1100" dirty="0"/>
           </a:p>
@@ -12852,7 +13029,7 @@
                 <a:ea typeface="Segoe UI" pitchFamily="34" charset="-122"/>
                 <a:cs typeface="Segoe UI" pitchFamily="34" charset="-120"/>
               </a:rPr>
-              <a:t>17 / 17</a:t>
+              <a:t>17 / 19</a:t>
             </a:r>
             <a:endParaRPr lang="en-US" sz="1100" dirty="0"/>
           </a:p>
@@ -13857,6 +14034,650 @@
               <a:t/>
             </a:r>
             <a:endParaRPr lang="en-US" sz="1300" dirty="0"/>
+          </a:p>
+        </p:txBody>
+      </p:sp>
+    </p:spTree>
+  </p:cSld>
+  <p:clrMapOvr>
+    <a:masterClrMapping/>
+  </p:clrMapOvr>
+</p:sld>
+</file>
+
+<file path=ppt/slides/slide19.xml><?xml version="1.0" encoding="utf-8"?>
+<p:sld xmlns:a="http://schemas.openxmlformats.org/drawingml/2006/main" xmlns:p="http://schemas.openxmlformats.org/presentationml/2006/main" xmlns:r="http://schemas.openxmlformats.org/officeDocument/2006/relationships">
+  <p:cSld>
+    <p:bg>
+      <p:bgPr>
+        <a:solidFill>
+          <a:srgbClr val="F4F2F8"/>
+        </a:solidFill>
+        <a:effectLst/>
+      </p:bgPr>
+    </p:bg>
+    <p:spTree>
+      <p:nvGrpSpPr>
+        <p:cNvPr id="1" name=""/>
+        <p:cNvGrpSpPr/>
+        <p:nvPr/>
+      </p:nvGrpSpPr>
+      <p:grpSpPr/>
+      <p:sp>
+        <p:nvSpPr>
+          <p:cNvPr id="2" name="TextBox 1"/>
+          <p:cNvSpPr txBox="1"/>
+          <p:nvPr/>
+        </p:nvSpPr>
+        <p:spPr>
+          <a:xfrm>
+            <a:off x="502920" y="256032"/>
+            <a:ext cx="17282160" cy="320040"/>
+          </a:xfrm>
+          <a:prstGeom prst="rect">
+            <a:avLst/>
+          </a:prstGeom>
+          <a:noFill/>
+        </p:spPr>
+        <p:txBody>
+          <a:bodyPr wrap="square" lIns="0" rIns="0" tIns="0" bIns="0">
+            <a:spAutoFit/>
+          </a:bodyPr>
+          <a:lstStyle/>
+          <a:p>
+            <a:pPr>
+              <a:defRPr sz="1200" b="1">
+                <a:solidFill>
+                  <a:srgbClr val="6A3B8E"/>
+                </a:solidFill>
+                <a:latin typeface="Segoe UI"/>
+              </a:defRPr>
+            </a:pPr>
+            <a:r>
+              <a:t>AI-IN-ONE  v2.0.0</a:t>
+            </a:r>
+          </a:p>
+        </p:txBody>
+      </p:sp>
+      <p:sp>
+        <p:nvSpPr>
+          <p:cNvPr id="3" name="TextBox 2"/>
+          <p:cNvSpPr txBox="1"/>
+          <p:nvPr/>
+        </p:nvSpPr>
+        <p:spPr>
+          <a:xfrm>
+            <a:off x="502920" y="749808"/>
+            <a:ext cx="17282160" cy="731520"/>
+          </a:xfrm>
+          <a:prstGeom prst="rect">
+            <a:avLst/>
+          </a:prstGeom>
+          <a:noFill/>
+        </p:spPr>
+        <p:txBody>
+          <a:bodyPr wrap="square" lIns="0" rIns="0" tIns="0" bIns="0">
+            <a:spAutoFit/>
+          </a:bodyPr>
+          <a:lstStyle/>
+          <a:p>
+            <a:pPr>
+              <a:defRPr sz="3000" b="1">
+                <a:solidFill>
+                  <a:srgbClr val="25335D"/>
+                </a:solidFill>
+                <a:latin typeface="Segoe UI"/>
+              </a:defRPr>
+            </a:pPr>
+            <a:r>
+              <a:t>Prioritization and monthly comparisons</a:t>
+            </a:r>
+          </a:p>
+        </p:txBody>
+      </p:sp>
+      <p:sp>
+        <p:nvSpPr>
+          <p:cNvPr id="4" name="TextBox 3"/>
+          <p:cNvSpPr txBox="1"/>
+          <p:nvPr/>
+        </p:nvSpPr>
+        <p:spPr>
+          <a:xfrm>
+            <a:off x="502920" y="1481328"/>
+            <a:ext cx="17282160" cy="594360"/>
+          </a:xfrm>
+          <a:prstGeom prst="rect">
+            <a:avLst/>
+          </a:prstGeom>
+          <a:noFill/>
+        </p:spPr>
+        <p:txBody>
+          <a:bodyPr wrap="square" lIns="0" rIns="0" tIns="0" bIns="0">
+            <a:spAutoFit/>
+          </a:bodyPr>
+          <a:lstStyle/>
+          <a:p>
+            <a:pPr>
+              <a:defRPr sz="1700" b="0">
+                <a:solidFill>
+                  <a:srgbClr val="243B60"/>
+                </a:solidFill>
+                <a:latin typeface="Segoe UI"/>
+              </a:defRPr>
+            </a:pPr>
+            <a:r>
+              <a:t>Use the view that matches the question; the score supports a conversation, not a decision.</a:t>
+            </a:r>
+          </a:p>
+        </p:txBody>
+      </p:sp>
+      <p:sp>
+        <p:nvSpPr>
+          <p:cNvPr id="5" name="TextBox 4"/>
+          <p:cNvSpPr txBox="1"/>
+          <p:nvPr/>
+        </p:nvSpPr>
+        <p:spPr>
+          <a:xfrm>
+            <a:off x="548640" y="2377440"/>
+            <a:ext cx="8503919" cy="365760"/>
+          </a:xfrm>
+          <a:prstGeom prst="rect">
+            <a:avLst/>
+          </a:prstGeom>
+          <a:noFill/>
+        </p:spPr>
+        <p:txBody>
+          <a:bodyPr wrap="square" lIns="0" rIns="0" tIns="0" bIns="0">
+            <a:spAutoFit/>
+          </a:bodyPr>
+          <a:lstStyle/>
+          <a:p>
+            <a:pPr>
+              <a:defRPr sz="1800" b="1">
+                <a:solidFill>
+                  <a:srgbClr val="55317B"/>
+                </a:solidFill>
+                <a:latin typeface="Segoe UI"/>
+              </a:defRPr>
+            </a:pPr>
+            <a:r>
+              <a:t>Choose a prioritization view</a:t>
+            </a:r>
+          </a:p>
+        </p:txBody>
+      </p:sp>
+      <p:sp>
+        <p:nvSpPr>
+          <p:cNvPr id="6" name="TextBox 5"/>
+          <p:cNvSpPr txBox="1"/>
+          <p:nvPr/>
+        </p:nvSpPr>
+        <p:spPr>
+          <a:xfrm>
+            <a:off x="548640" y="2770632"/>
+            <a:ext cx="8503919" cy="1319022"/>
+          </a:xfrm>
+          <a:prstGeom prst="rect">
+            <a:avLst/>
+          </a:prstGeom>
+          <a:noFill/>
+        </p:spPr>
+        <p:txBody>
+          <a:bodyPr wrap="square" lIns="0" rIns="0" tIns="0" bIns="0">
+            <a:spAutoFit/>
+          </a:bodyPr>
+          <a:lstStyle/>
+          <a:p>
+            <a:pPr>
+              <a:defRPr sz="1500" b="0">
+                <a:solidFill>
+                  <a:srgbClr val="243B60"/>
+                </a:solidFill>
+                <a:latin typeface="Segoe UI"/>
+              </a:defRPr>
+            </a:pPr>
+            <a:r>
+              <a:t>Paid/free counts, independent activity choices, Departments and protected person search work together. Clear filters resets the selections.</a:t>
+            </a:r>
+          </a:p>
+        </p:txBody>
+      </p:sp>
+      <p:sp>
+        <p:nvSpPr>
+          <p:cNvPr id="7" name="TextBox 6"/>
+          <p:cNvSpPr txBox="1"/>
+          <p:nvPr/>
+        </p:nvSpPr>
+        <p:spPr>
+          <a:xfrm>
+            <a:off x="548640" y="4171950"/>
+            <a:ext cx="8503919" cy="365760"/>
+          </a:xfrm>
+          <a:prstGeom prst="rect">
+            <a:avLst/>
+          </a:prstGeom>
+          <a:noFill/>
+        </p:spPr>
+        <p:txBody>
+          <a:bodyPr wrap="square" lIns="0" rIns="0" tIns="0" bIns="0">
+            <a:spAutoFit/>
+          </a:bodyPr>
+          <a:lstStyle/>
+          <a:p>
+            <a:pPr>
+              <a:defRPr sz="1800" b="1">
+                <a:solidFill>
+                  <a:srgbClr val="55317B"/>
+                </a:solidFill>
+                <a:latin typeface="Segoe UI"/>
+              </a:defRPr>
+            </a:pPr>
+            <a:r>
+              <a:t>Choose Sessions or Prompts</a:t>
+            </a:r>
+          </a:p>
+        </p:txBody>
+      </p:sp>
+      <p:sp>
+        <p:nvSpPr>
+          <p:cNvPr id="8" name="TextBox 7"/>
+          <p:cNvSpPr txBox="1"/>
+          <p:nvPr/>
+        </p:nvSpPr>
+        <p:spPr>
+          <a:xfrm>
+            <a:off x="548640" y="4565142"/>
+            <a:ext cx="8503919" cy="1319022"/>
+          </a:xfrm>
+          <a:prstGeom prst="rect">
+            <a:avLst/>
+          </a:prstGeom>
+          <a:noFill/>
+        </p:spPr>
+        <p:txBody>
+          <a:bodyPr wrap="square" lIns="0" rIns="0" tIns="0" bIns="0">
+            <a:spAutoFit/>
+          </a:bodyPr>
+          <a:lstStyle/>
+          <a:p>
+            <a:pPr>
+              <a:defRPr sz="1500" b="0">
+                <a:solidFill>
+                  <a:srgbClr val="243B60"/>
+                </a:solidFill>
+                <a:latin typeface="Segoe UI"/>
+              </a:defRPr>
+            </a:pPr>
+            <a:r>
+              <a:t>Sessions is the default. Prompts uses the same 10/5/5 benchmarks and 60/30/10 weights in prompt units. The score is uncapped, not a percentage or productivity measure.</a:t>
+            </a:r>
+          </a:p>
+        </p:txBody>
+      </p:sp>
+      <p:sp>
+        <p:nvSpPr>
+          <p:cNvPr id="9" name="TextBox 8"/>
+          <p:cNvSpPr txBox="1"/>
+          <p:nvPr/>
+        </p:nvSpPr>
+        <p:spPr>
+          <a:xfrm>
+            <a:off x="548640" y="5966460"/>
+            <a:ext cx="8503919" cy="365760"/>
+          </a:xfrm>
+          <a:prstGeom prst="rect">
+            <a:avLst/>
+          </a:prstGeom>
+          <a:noFill/>
+        </p:spPr>
+        <p:txBody>
+          <a:bodyPr wrap="square" lIns="0" rIns="0" tIns="0" bIns="0">
+            <a:spAutoFit/>
+          </a:bodyPr>
+          <a:lstStyle/>
+          <a:p>
+            <a:pPr>
+              <a:defRPr sz="1800" b="1">
+                <a:solidFill>
+                  <a:srgbClr val="55317B"/>
+                </a:solidFill>
+                <a:latin typeface="Segoe UI"/>
+              </a:defRPr>
+            </a:pPr>
+            <a:r>
+              <a:t>Compare months</a:t>
+            </a:r>
+          </a:p>
+        </p:txBody>
+      </p:sp>
+      <p:sp>
+        <p:nvSpPr>
+          <p:cNvPr id="10" name="TextBox 9"/>
+          <p:cNvSpPr txBox="1"/>
+          <p:nvPr/>
+        </p:nvSpPr>
+        <p:spPr>
+          <a:xfrm>
+            <a:off x="548640" y="6359652"/>
+            <a:ext cx="8503919" cy="1319022"/>
+          </a:xfrm>
+          <a:prstGeom prst="rect">
+            <a:avLst/>
+          </a:prstGeom>
+          <a:noFill/>
+        </p:spPr>
+        <p:txBody>
+          <a:bodyPr wrap="square" lIns="0" rIns="0" tIns="0" bIns="0">
+            <a:spAutoFit/>
+          </a:bodyPr>
+          <a:lstStyle/>
+          <a:p>
+            <a:pPr>
+              <a:defRPr sz="1500" b="0">
+                <a:solidFill>
+                  <a:srgbClr val="243B60"/>
+                </a:solidFill>
+                <a:latin typeface="Segoe UI"/>
+              </a:defRPr>
+            </a:pPr>
+            <a:r>
+              <a:t>Combined Trends compares monthly totals, distinct active people and per-active-person ratios in temporal paid/free cohorts. Weekly-only rank controls do not change totals.</a:t>
+            </a:r>
+          </a:p>
+        </p:txBody>
+      </p:sp>
+      <p:sp>
+        <p:nvSpPr>
+          <p:cNvPr id="11" name="TextBox 10"/>
+          <p:cNvSpPr txBox="1"/>
+          <p:nvPr/>
+        </p:nvSpPr>
+        <p:spPr>
+          <a:xfrm>
+            <a:off x="548640" y="7760969"/>
+            <a:ext cx="8503919" cy="365760"/>
+          </a:xfrm>
+          <a:prstGeom prst="rect">
+            <a:avLst/>
+          </a:prstGeom>
+          <a:noFill/>
+        </p:spPr>
+        <p:txBody>
+          <a:bodyPr wrap="square" lIns="0" rIns="0" tIns="0" bIns="0">
+            <a:spAutoFit/>
+          </a:bodyPr>
+          <a:lstStyle/>
+          <a:p>
+            <a:pPr>
+              <a:defRPr sz="1800" b="1">
+                <a:solidFill>
+                  <a:srgbClr val="55317B"/>
+                </a:solidFill>
+                <a:latin typeface="Segoe UI"/>
+              </a:defRPr>
+            </a:pPr>
+            <a:r>
+              <a:t>Allow overlap</a:t>
+            </a:r>
+          </a:p>
+        </p:txBody>
+      </p:sp>
+      <p:sp>
+        <p:nvSpPr>
+          <p:cNvPr id="12" name="TextBox 11"/>
+          <p:cNvSpPr txBox="1"/>
+          <p:nvPr/>
+        </p:nvSpPr>
+        <p:spPr>
+          <a:xfrm>
+            <a:off x="548640" y="8154161"/>
+            <a:ext cx="8503919" cy="1319022"/>
+          </a:xfrm>
+          <a:prstGeom prst="rect">
+            <a:avLst/>
+          </a:prstGeom>
+          <a:noFill/>
+        </p:spPr>
+        <p:txBody>
+          <a:bodyPr wrap="square" lIns="0" rIns="0" tIns="0" bIns="0">
+            <a:spAutoFit/>
+          </a:bodyPr>
+          <a:lstStyle/>
+          <a:p>
+            <a:pPr>
+              <a:defRPr sz="1500" b="0">
+                <a:solidFill>
+                  <a:srgbClr val="243B60"/>
+                </a:solidFill>
+                <a:latin typeface="Segoe UI"/>
+              </a:defRPr>
+            </a:pPr>
+            <a:r>
+              <a:t>With observed history, a person may belong to paid and free populations in one period. Distinct totals can be smaller than their sum.</a:t>
+            </a:r>
+          </a:p>
+        </p:txBody>
+      </p:sp>
+      <p:pic>
+        <p:nvPicPr>
+          <p:cNvPr id="13" name="Picture 12" descr="combined-monthly-comparison.png"/>
+          <p:cNvPicPr>
+            <a:picLocks noChangeAspect="1"/>
+          </p:cNvPicPr>
+          <p:nvPr/>
+        </p:nvPicPr>
+        <p:blipFill>
+          <a:blip r:embed="rId2"/>
+          <a:stretch>
+            <a:fillRect/>
+          </a:stretch>
+        </p:blipFill>
+        <p:spPr>
+          <a:xfrm>
+            <a:off x="9692640" y="2514600"/>
+            <a:ext cx="7863840" cy="4836494"/>
+          </a:xfrm>
+          <a:prstGeom prst="rect">
+            <a:avLst/>
+          </a:prstGeom>
+        </p:spPr>
+      </p:pic>
+      <p:sp>
+        <p:nvSpPr>
+          <p:cNvPr id="14" name="TextBox 13"/>
+          <p:cNvSpPr txBox="1"/>
+          <p:nvPr/>
+        </p:nvSpPr>
+        <p:spPr>
+          <a:xfrm>
+            <a:off x="9692640" y="7488254"/>
+            <a:ext cx="7863840" cy="594360"/>
+          </a:xfrm>
+          <a:prstGeom prst="rect">
+            <a:avLst/>
+          </a:prstGeom>
+          <a:noFill/>
+        </p:spPr>
+        <p:txBody>
+          <a:bodyPr wrap="square" lIns="0" rIns="0" tIns="0" bIns="0">
+            <a:spAutoFit/>
+          </a:bodyPr>
+          <a:lstStyle/>
+          <a:p>
+            <a:pPr>
+              <a:defRPr sz="1200" b="0">
+                <a:solidFill>
+                  <a:srgbClr val="243B60"/>
+                </a:solidFill>
+                <a:latin typeface="Segoe UI"/>
+              </a:defRPr>
+            </a:pPr>
+            <a:r>
+              <a:t>Monthly comparison using the unchanged synthetic snapshot.</a:t>
+            </a:r>
+          </a:p>
+        </p:txBody>
+      </p:sp>
+      <p:sp>
+        <p:nvSpPr>
+          <p:cNvPr id="15" name="TextBox 14"/>
+          <p:cNvSpPr txBox="1"/>
+          <p:nvPr/>
+        </p:nvSpPr>
+        <p:spPr>
+          <a:xfrm>
+            <a:off x="548640" y="9692640"/>
+            <a:ext cx="17190720" cy="228600"/>
+          </a:xfrm>
+          <a:prstGeom prst="rect">
+            <a:avLst/>
+          </a:prstGeom>
+          <a:noFill/>
+        </p:spPr>
+        <p:txBody>
+          <a:bodyPr wrap="square" lIns="0" rIns="0" tIns="0" bIns="0">
+            <a:spAutoFit/>
+          </a:bodyPr>
+          <a:lstStyle/>
+          <a:p>
+            <a:pPr>
+              <a:defRPr sz="1100" b="0">
+                <a:solidFill>
+                  <a:srgbClr val="243B60"/>
+                </a:solidFill>
+                <a:latin typeface="Segoe UI"/>
+              </a:defRPr>
+            </a:pPr>
+            <a:r>
+              <a:t>Example data is illustrative, not a benchmark. Minimum Group Size defaults to 3.</a:t>
+            </a:r>
+          </a:p>
+        </p:txBody>
+      </p:sp>
+      <p:pic>
+        <p:nvPicPr>
+          <p:cNvPr id="16" name="Approved template chrome 16" descr="Microsoft Copilot"/>
+          <p:cNvPicPr>
+            <a:picLocks noChangeAspect="1"/>
+          </p:cNvPicPr>
+          <p:nvPr/>
+        </p:nvPicPr>
+        <p:blipFill>
+          <a:blip r:embed="rId4"/>
+          <a:stretch>
+            <a:fillRect/>
+          </a:stretch>
+        </p:blipFill>
+        <p:spPr>
+          <a:xfrm>
+            <a:off x="17026128" y="457200"/>
+            <a:ext cx="758952" cy="758952"/>
+          </a:xfrm>
+          <a:prstGeom prst="rect">
+            <a:avLst/>
+          </a:prstGeom>
+        </p:spPr>
+      </p:pic>
+      <p:pic>
+        <p:nvPicPr>
+          <p:cNvPr id="17" name="Approved template chrome 17" descr="Microsoft"/>
+          <p:cNvPicPr>
+            <a:picLocks noChangeAspect="1"/>
+          </p:cNvPicPr>
+          <p:nvPr/>
+        </p:nvPicPr>
+        <p:blipFill>
+          <a:blip r:embed="rId5"/>
+          <a:stretch>
+            <a:fillRect/>
+          </a:stretch>
+        </p:blipFill>
+        <p:spPr>
+          <a:xfrm>
+            <a:off x="713232" y="9729216"/>
+            <a:ext cx="1042416" cy="557784"/>
+          </a:xfrm>
+          <a:prstGeom prst="rect">
+            <a:avLst/>
+          </a:prstGeom>
+        </p:spPr>
+      </p:pic>
+      <p:sp>
+        <p:nvSpPr>
+          <p:cNvPr id="18" name="Approved template chrome 18"/>
+          <p:cNvSpPr/>
+          <p:nvPr/>
+        </p:nvSpPr>
+        <p:spPr>
+          <a:xfrm>
+            <a:off x="16175736" y="9875520"/>
+            <a:ext cx="1499616" cy="292608"/>
+          </a:xfrm>
+          <a:prstGeom prst="rect">
+            <a:avLst/>
+          </a:prstGeom>
+          <a:noFill/>
+          <a:ln/>
+        </p:spPr>
+        <p:txBody>
+          <a:bodyPr wrap="square" lIns="0" tIns="0" rIns="0" bIns="0" rtlCol="0" anchor="ctr"/>
+          <a:lstStyle/>
+          <a:p>
+            <a:pPr marL="0" indent="0" algn="r">
+              <a:buNone/>
+            </a:pPr>
+            <a:r>
+              <a:rPr lang="en-US" sz="1100" dirty="0">
+                <a:solidFill>
+                  <a:srgbClr val="637087"/>
+                </a:solidFill>
+                <a:latin typeface="Segoe UI" pitchFamily="34" charset="0"/>
+                <a:ea typeface="Segoe UI" pitchFamily="34" charset="-122"/>
+                <a:cs typeface="Segoe UI" pitchFamily="34" charset="-120"/>
+              </a:rPr>
+              <a:t>18 / 19</a:t>
+            </a:r>
+            <a:endParaRPr lang="en-US" sz="1100" dirty="0"/>
+          </a:p>
+        </p:txBody>
+      </p:sp>
+      <p:sp>
+        <p:nvSpPr>
+          <p:cNvPr id="19" name="Approved template chrome 19"/>
+          <p:cNvSpPr/>
+          <p:nvPr/>
+        </p:nvSpPr>
+        <p:spPr>
+          <a:xfrm>
+            <a:off x="2103120" y="9875520"/>
+            <a:ext cx="13716000" cy="292608"/>
+          </a:xfrm>
+          <a:prstGeom prst="rect">
+            <a:avLst/>
+          </a:prstGeom>
+          <a:noFill/>
+          <a:ln/>
+        </p:spPr>
+        <p:txBody>
+          <a:bodyPr wrap="square" lIns="0" tIns="0" rIns="0" bIns="0" rtlCol="0" anchor="ctr"/>
+          <a:lstStyle/>
+          <a:p>
+            <a:pPr marL="0" indent="0">
+              <a:buNone/>
+            </a:pPr>
+            <a:r>
+              <a:rPr lang="en-US" sz="1100" dirty="0">
+                <a:solidFill>
+                  <a:srgbClr val="637087"/>
+                </a:solidFill>
+                <a:latin typeface="Segoe UI" pitchFamily="34" charset="0"/>
+                <a:ea typeface="Segoe UI" pitchFamily="34" charset="-122"/>
+                <a:cs typeface="Segoe UI" pitchFamily="34" charset="-120"/>
+              </a:rPr>
+              <a:t>AI-in-One Dashboard v2.0.0  ·  Storyboard  ·  Example data</a:t>
+            </a:r>
+            <a:endParaRPr lang="en-US" sz="1100" dirty="0"/>
           </a:p>
         </p:txBody>
       </p:sp>
@@ -13974,7 +14795,7 @@
                 <a:ea typeface="Segoe UI" pitchFamily="34" charset="-122"/>
                 <a:cs typeface="Segoe UI" pitchFamily="34" charset="-120"/>
               </a:rPr>
-              <a:t>02 / 17</a:t>
+              <a:t>02 / 19</a:t>
             </a:r>
             <a:endParaRPr lang="en-US" sz="1100" dirty="0"/>
           </a:p>
@@ -15141,6 +15962,734 @@
               <a:t>Today we'll see who is using Copilot, whether it's becoming part of how we work, and where to focus next.</a:t>
             </a:r>
             <a:endParaRPr lang="en-US" sz="1500" dirty="0"/>
+          </a:p>
+        </p:txBody>
+      </p:sp>
+    </p:spTree>
+  </p:cSld>
+  <p:clrMapOvr>
+    <a:masterClrMapping/>
+  </p:clrMapOvr>
+</p:sld>
+</file>
+
+<file path=ppt/slides/slide20.xml><?xml version="1.0" encoding="utf-8"?>
+<p:sld xmlns:a="http://schemas.openxmlformats.org/drawingml/2006/main" xmlns:p="http://schemas.openxmlformats.org/presentationml/2006/main" xmlns:r="http://schemas.openxmlformats.org/officeDocument/2006/relationships">
+  <p:cSld>
+    <p:bg>
+      <p:bgPr>
+        <a:solidFill>
+          <a:srgbClr val="F4F2F8"/>
+        </a:solidFill>
+        <a:effectLst/>
+      </p:bgPr>
+    </p:bg>
+    <p:spTree>
+      <p:nvGrpSpPr>
+        <p:cNvPr id="1" name=""/>
+        <p:cNvGrpSpPr/>
+        <p:nvPr/>
+      </p:nvGrpSpPr>
+      <p:grpSpPr/>
+      <p:sp>
+        <p:nvSpPr>
+          <p:cNvPr id="2" name="TextBox 1"/>
+          <p:cNvSpPr txBox="1"/>
+          <p:nvPr/>
+        </p:nvSpPr>
+        <p:spPr>
+          <a:xfrm>
+            <a:off x="502920" y="256032"/>
+            <a:ext cx="17282160" cy="320040"/>
+          </a:xfrm>
+          <a:prstGeom prst="rect">
+            <a:avLst/>
+          </a:prstGeom>
+          <a:noFill/>
+        </p:spPr>
+        <p:txBody>
+          <a:bodyPr wrap="square" lIns="0" rIns="0" tIns="0" bIns="0">
+            <a:spAutoFit/>
+          </a:bodyPr>
+          <a:lstStyle/>
+          <a:p>
+            <a:pPr>
+              <a:defRPr sz="1200" b="1">
+                <a:solidFill>
+                  <a:srgbClr val="6A3B8E"/>
+                </a:solidFill>
+                <a:latin typeface="Segoe UI"/>
+              </a:defRPr>
+            </a:pPr>
+            <a:r>
+              <a:t>AI-IN-ONE  v2.0.0</a:t>
+            </a:r>
+          </a:p>
+        </p:txBody>
+      </p:sp>
+      <p:sp>
+        <p:nvSpPr>
+          <p:cNvPr id="3" name="TextBox 2"/>
+          <p:cNvSpPr txBox="1"/>
+          <p:nvPr/>
+        </p:nvSpPr>
+        <p:spPr>
+          <a:xfrm>
+            <a:off x="502920" y="749808"/>
+            <a:ext cx="17282160" cy="731520"/>
+          </a:xfrm>
+          <a:prstGeom prst="rect">
+            <a:avLst/>
+          </a:prstGeom>
+          <a:noFill/>
+        </p:spPr>
+        <p:txBody>
+          <a:bodyPr wrap="square" lIns="0" rIns="0" tIns="0" bIns="0">
+            <a:spAutoFit/>
+          </a:bodyPr>
+          <a:lstStyle/>
+          <a:p>
+            <a:pPr>
+              <a:defRPr sz="3000" b="1">
+                <a:solidFill>
+                  <a:srgbClr val="25335D"/>
+                </a:solidFill>
+                <a:latin typeface="Segoe UI"/>
+              </a:defRPr>
+            </a:pPr>
+            <a:r>
+              <a:t>Read observed history responsibly</a:t>
+            </a:r>
+          </a:p>
+        </p:txBody>
+      </p:sp>
+      <p:sp>
+        <p:nvSpPr>
+          <p:cNvPr id="4" name="TextBox 3"/>
+          <p:cNvSpPr txBox="1"/>
+          <p:nvPr/>
+        </p:nvSpPr>
+        <p:spPr>
+          <a:xfrm>
+            <a:off x="502920" y="1481328"/>
+            <a:ext cx="17282160" cy="594360"/>
+          </a:xfrm>
+          <a:prstGeom prst="rect">
+            <a:avLst/>
+          </a:prstGeom>
+          <a:noFill/>
+        </p:spPr>
+        <p:txBody>
+          <a:bodyPr wrap="square" lIns="0" rIns="0" tIns="0" bIns="0">
+            <a:spAutoFit/>
+          </a:bodyPr>
+          <a:lstStyle/>
+          <a:p>
+            <a:pPr>
+              <a:defRPr sz="1700" b="0">
+                <a:solidFill>
+                  <a:srgbClr val="243B60"/>
+                </a:solidFill>
+                <a:latin typeface="Segoe UI"/>
+              </a:defRPr>
+            </a:pPr>
+            <a:r>
+              <a:t>Protected person timelines show First seen observations, not assignments; collection cannot reconstruct unobserved changes.</a:t>
+            </a:r>
+          </a:p>
+        </p:txBody>
+      </p:sp>
+      <p:sp>
+        <p:nvSpPr>
+          <p:cNvPr id="5" name="TextBox 4"/>
+          <p:cNvSpPr txBox="1"/>
+          <p:nvPr/>
+        </p:nvSpPr>
+        <p:spPr>
+          <a:xfrm>
+            <a:off x="548640" y="2377440"/>
+            <a:ext cx="17190719" cy="365760"/>
+          </a:xfrm>
+          <a:prstGeom prst="rect">
+            <a:avLst/>
+          </a:prstGeom>
+          <a:noFill/>
+        </p:spPr>
+        <p:txBody>
+          <a:bodyPr wrap="square" lIns="0" rIns="0" tIns="0" bIns="0">
+            <a:spAutoFit/>
+          </a:bodyPr>
+          <a:lstStyle/>
+          <a:p>
+            <a:pPr>
+              <a:defRPr sz="1800" b="1">
+                <a:solidFill>
+                  <a:srgbClr val="55317B"/>
+                </a:solidFill>
+                <a:latin typeface="Segoe UI"/>
+              </a:defRPr>
+            </a:pPr>
+            <a:r>
+              <a:t>History across the existing report</a:t>
+            </a:r>
+          </a:p>
+        </p:txBody>
+      </p:sp>
+      <p:sp>
+        <p:nvSpPr>
+          <p:cNvPr id="6" name="TextBox 5"/>
+          <p:cNvSpPr txBox="1"/>
+          <p:nvPr/>
+        </p:nvSpPr>
+        <p:spPr>
+          <a:xfrm>
+            <a:off x="548640" y="2770632"/>
+            <a:ext cx="17190719" cy="720852"/>
+          </a:xfrm>
+          <a:prstGeom prst="rect">
+            <a:avLst/>
+          </a:prstGeom>
+          <a:noFill/>
+        </p:spPr>
+        <p:txBody>
+          <a:bodyPr wrap="square" lIns="0" rIns="0" tIns="0" bIns="0">
+            <a:spAutoFit/>
+          </a:bodyPr>
+          <a:lstStyle/>
+          <a:p>
+            <a:pPr>
+              <a:defRPr sz="1500" b="0">
+                <a:solidFill>
+                  <a:srgbClr val="243B60"/>
+                </a:solidFill>
+                <a:latin typeface="Segoe UI"/>
+              </a:defRPr>
+            </a:pPr>
+            <a:r>
+              <a:t>All 17 pages count people by stable person key, not state UserKey. Organization follows the latest person record; activity uses event-time licensing. History Off and one-state inputs keep snapshots.</a:t>
+            </a:r>
+          </a:p>
+        </p:txBody>
+      </p:sp>
+      <p:sp>
+        <p:nvSpPr>
+          <p:cNvPr id="7" name="TextBox 6"/>
+          <p:cNvSpPr txBox="1"/>
+          <p:nvPr/>
+        </p:nvSpPr>
+        <p:spPr>
+          <a:xfrm>
+            <a:off x="548640" y="3573780"/>
+            <a:ext cx="17190719" cy="365760"/>
+          </a:xfrm>
+          <a:prstGeom prst="rect">
+            <a:avLst/>
+          </a:prstGeom>
+          <a:noFill/>
+        </p:spPr>
+        <p:txBody>
+          <a:bodyPr wrap="square" lIns="0" rIns="0" tIns="0" bIns="0">
+            <a:spAutoFit/>
+          </a:bodyPr>
+          <a:lstStyle/>
+          <a:p>
+            <a:pPr>
+              <a:defRPr sz="1800" b="1">
+                <a:solidFill>
+                  <a:srgbClr val="55317B"/>
+                </a:solidFill>
+                <a:latin typeface="Segoe UI"/>
+              </a:defRPr>
+            </a:pPr>
+            <a:r>
+              <a:t>License Population in Period</a:t>
+            </a:r>
+          </a:p>
+        </p:txBody>
+      </p:sp>
+      <p:sp>
+        <p:nvSpPr>
+          <p:cNvPr id="8" name="TextBox 7"/>
+          <p:cNvSpPr txBox="1"/>
+          <p:nvPr/>
+        </p:nvSpPr>
+        <p:spPr>
+          <a:xfrm>
+            <a:off x="548640" y="3966971"/>
+            <a:ext cx="17190719" cy="720852"/>
+          </a:xfrm>
+          <a:prstGeom prst="rect">
+            <a:avLst/>
+          </a:prstGeom>
+          <a:noFill/>
+        </p:spPr>
+        <p:txBody>
+          <a:bodyPr wrap="square" lIns="0" rIns="0" tIns="0" bIns="0">
+            <a:spAutoFit/>
+          </a:bodyPr>
+          <a:lstStyle/>
+          <a:p>
+            <a:pPr>
+              <a:defRPr sz="1500" b="0">
+                <a:solidFill>
+                  <a:srgbClr val="243B60"/>
+                </a:solidFill>
+                <a:latin typeface="Segoe UI"/>
+              </a:defRPr>
+            </a:pPr>
+            <a:r>
+              <a:t>Distinct authorized people with a recorded state in effect during the period. Paid/free periods can overlap; the earliest dated state covers earlier events. Unknown stays Unknown.</a:t>
+            </a:r>
+          </a:p>
+        </p:txBody>
+      </p:sp>
+      <p:sp>
+        <p:nvSpPr>
+          <p:cNvPr id="9" name="TextBox 8"/>
+          <p:cNvSpPr txBox="1"/>
+          <p:nvPr/>
+        </p:nvSpPr>
+        <p:spPr>
+          <a:xfrm>
+            <a:off x="548640" y="4770120"/>
+            <a:ext cx="17190719" cy="365760"/>
+          </a:xfrm>
+          <a:prstGeom prst="rect">
+            <a:avLst/>
+          </a:prstGeom>
+          <a:noFill/>
+        </p:spPr>
+        <p:txBody>
+          <a:bodyPr wrap="square" lIns="0" rIns="0" tIns="0" bIns="0">
+            <a:spAutoFit/>
+          </a:bodyPr>
+          <a:lstStyle/>
+          <a:p>
+            <a:pPr>
+              <a:defRPr sz="1800" b="1">
+                <a:solidFill>
+                  <a:srgbClr val="55317B"/>
+                </a:solidFill>
+                <a:latin typeface="Segoe UI"/>
+              </a:defRPr>
+            </a:pPr>
+            <a:r>
+              <a:t>Keep existing definitions</a:t>
+            </a:r>
+          </a:p>
+        </p:txBody>
+      </p:sp>
+      <p:sp>
+        <p:nvSpPr>
+          <p:cNvPr id="10" name="TextBox 9"/>
+          <p:cNvSpPr txBox="1"/>
+          <p:nvPr/>
+        </p:nvSpPr>
+        <p:spPr>
+          <a:xfrm>
+            <a:off x="548640" y="5163312"/>
+            <a:ext cx="17190719" cy="720852"/>
+          </a:xfrm>
+          <a:prstGeom prst="rect">
+            <a:avLst/>
+          </a:prstGeom>
+          <a:noFill/>
+        </p:spPr>
+        <p:txBody>
+          <a:bodyPr wrap="square" lIns="0" rIns="0" tIns="0" bIns="0">
+            <a:spAutoFit/>
+          </a:bodyPr>
+          <a:lstStyle/>
+          <a:p>
+            <a:pPr>
+              <a:defRPr sz="1500" b="0">
+                <a:solidFill>
+                  <a:srgbClr val="243B60"/>
+                </a:solidFill>
+                <a:latin typeface="Segoe UI"/>
+              </a:defRPr>
+            </a:pPr>
+            <a:r>
+              <a:t>Habit bands stay 1–5, 6–10, 11–15 and 16+ active days in the displayed month. Prompt-only messages do not support a responses-per-prompt metric.</a:t>
+            </a:r>
+          </a:p>
+        </p:txBody>
+      </p:sp>
+      <p:sp>
+        <p:nvSpPr>
+          <p:cNvPr id="11" name="TextBox 10"/>
+          <p:cNvSpPr txBox="1"/>
+          <p:nvPr/>
+        </p:nvSpPr>
+        <p:spPr>
+          <a:xfrm>
+            <a:off x="548640" y="5966460"/>
+            <a:ext cx="17190719" cy="365760"/>
+          </a:xfrm>
+          <a:prstGeom prst="rect">
+            <a:avLst/>
+          </a:prstGeom>
+          <a:noFill/>
+        </p:spPr>
+        <p:txBody>
+          <a:bodyPr wrap="square" lIns="0" rIns="0" tIns="0" bIns="0">
+            <a:spAutoFit/>
+          </a:bodyPr>
+          <a:lstStyle/>
+          <a:p>
+            <a:pPr>
+              <a:defRPr sz="1800" b="1">
+                <a:solidFill>
+                  <a:srgbClr val="55317B"/>
+                </a:solidFill>
+                <a:latin typeface="Segoe UI"/>
+              </a:defRPr>
+            </a:pPr>
+            <a:r>
+              <a:t>Use patterns, not claimed outcomes</a:t>
+            </a:r>
+          </a:p>
+        </p:txBody>
+      </p:sp>
+      <p:sp>
+        <p:nvSpPr>
+          <p:cNvPr id="12" name="TextBox 11"/>
+          <p:cNvSpPr txBox="1"/>
+          <p:nvPr/>
+        </p:nvSpPr>
+        <p:spPr>
+          <a:xfrm>
+            <a:off x="548640" y="6359652"/>
+            <a:ext cx="17190719" cy="720852"/>
+          </a:xfrm>
+          <a:prstGeom prst="rect">
+            <a:avLst/>
+          </a:prstGeom>
+          <a:noFill/>
+        </p:spPr>
+        <p:txBody>
+          <a:bodyPr wrap="square" lIns="0" rIns="0" tIns="0" bIns="0">
+            <a:spAutoFit/>
+          </a:bodyPr>
+          <a:lstStyle/>
+          <a:p>
+            <a:pPr>
+              <a:defRPr sz="1500" b="0">
+                <a:solidFill>
+                  <a:srgbClr val="243B60"/>
+                </a:solidFill>
+                <a:latin typeface="Segoe UI"/>
+              </a:defRPr>
+            </a:pPr>
+            <a:r>
+              <a:t>Stored behavior labels use resource/action/context/plugin/app-host evidence and sometimes agent-name keywords. Leading patterns use agent sessions with alphabetical ties; no prompt-text AI inference is implied.</a:t>
+            </a:r>
+          </a:p>
+        </p:txBody>
+      </p:sp>
+      <p:sp>
+        <p:nvSpPr>
+          <p:cNvPr id="13" name="TextBox 12"/>
+          <p:cNvSpPr txBox="1"/>
+          <p:nvPr/>
+        </p:nvSpPr>
+        <p:spPr>
+          <a:xfrm>
+            <a:off x="548640" y="7162800"/>
+            <a:ext cx="17190719" cy="365760"/>
+          </a:xfrm>
+          <a:prstGeom prst="rect">
+            <a:avLst/>
+          </a:prstGeom>
+          <a:noFill/>
+        </p:spPr>
+        <p:txBody>
+          <a:bodyPr wrap="square" lIns="0" rIns="0" tIns="0" bIns="0">
+            <a:spAutoFit/>
+          </a:bodyPr>
+          <a:lstStyle/>
+          <a:p>
+            <a:pPr>
+              <a:defRPr sz="1800" b="1">
+                <a:solidFill>
+                  <a:srgbClr val="55317B"/>
+                </a:solidFill>
+                <a:latin typeface="Segoe UI"/>
+              </a:defRPr>
+            </a:pPr>
+            <a:r>
+              <a:t>Recognize the example</a:t>
+            </a:r>
+          </a:p>
+        </p:txBody>
+      </p:sp>
+      <p:sp>
+        <p:nvSpPr>
+          <p:cNvPr id="14" name="TextBox 13"/>
+          <p:cNvSpPr txBox="1"/>
+          <p:nvPr/>
+        </p:nvSpPr>
+        <p:spPr>
+          <a:xfrm>
+            <a:off x="548640" y="7555992"/>
+            <a:ext cx="17190719" cy="720852"/>
+          </a:xfrm>
+          <a:prstGeom prst="rect">
+            <a:avLst/>
+          </a:prstGeom>
+          <a:noFill/>
+        </p:spPr>
+        <p:txBody>
+          <a:bodyPr wrap="square" lIns="0" rIns="0" tIns="0" bIns="0">
+            <a:spAutoFit/>
+          </a:bodyPr>
+          <a:lstStyle/>
+          <a:p>
+            <a:pPr>
+              <a:defRPr sz="1500" b="0">
+                <a:solidFill>
+                  <a:srgbClr val="243B60"/>
+                </a:solidFill>
+                <a:latin typeface="Segoe UI"/>
+              </a:defRPr>
+            </a:pPr>
+            <a:r>
+              <a:t>The unchanged sample has 7,973 agent users: 5,829 paid + 2,144 free with no overlap. That sample fact is not a universal rule for observed history.</a:t>
+            </a:r>
+          </a:p>
+        </p:txBody>
+      </p:sp>
+      <p:sp>
+        <p:nvSpPr>
+          <p:cNvPr id="15" name="TextBox 14"/>
+          <p:cNvSpPr txBox="1"/>
+          <p:nvPr/>
+        </p:nvSpPr>
+        <p:spPr>
+          <a:xfrm>
+            <a:off x="548640" y="8359140"/>
+            <a:ext cx="17190719" cy="365760"/>
+          </a:xfrm>
+          <a:prstGeom prst="rect">
+            <a:avLst/>
+          </a:prstGeom>
+          <a:noFill/>
+        </p:spPr>
+        <p:txBody>
+          <a:bodyPr wrap="square" lIns="0" rIns="0" tIns="0" bIns="0">
+            <a:spAutoFit/>
+          </a:bodyPr>
+          <a:lstStyle/>
+          <a:p>
+            <a:pPr>
+              <a:defRPr sz="1800" b="1">
+                <a:solidFill>
+                  <a:srgbClr val="55317B"/>
+                </a:solidFill>
+                <a:latin typeface="Segoe UI"/>
+              </a:defRPr>
+            </a:pPr>
+            <a:r>
+              <a:t>Fabric keeps both source choices explicit</a:t>
+            </a:r>
+          </a:p>
+        </p:txBody>
+      </p:sp>
+      <p:sp>
+        <p:nvSpPr>
+          <p:cNvPr id="16" name="TextBox 15"/>
+          <p:cNvSpPr txBox="1"/>
+          <p:nvPr/>
+        </p:nvSpPr>
+        <p:spPr>
+          <a:xfrm>
+            <a:off x="548640" y="8752332"/>
+            <a:ext cx="17190719" cy="720852"/>
+          </a:xfrm>
+          <a:prstGeom prst="rect">
+            <a:avLst/>
+          </a:prstGeom>
+          <a:noFill/>
+        </p:spPr>
+        <p:txBody>
+          <a:bodyPr wrap="square" lIns="0" rIns="0" tIns="0" bIns="0">
+            <a:spAutoFit/>
+          </a:bodyPr>
+          <a:lstStyle/>
+          <a:p>
+            <a:pPr>
+              <a:defRPr sz="1500" b="0">
+                <a:solidFill>
+                  <a:srgbClr val="243B60"/>
+                </a:solidFill>
+                <a:latin typeface="Segoe UI"/>
+              </a:defRPr>
+            </a:pPr>
+            <a:r>
+              <a:t>Default Graph collectors remain current snapshots. Paired processed-PAX CSV inputs preserve already-exported states, dates and event attribution; preparation validates the publication contract.</a:t>
+            </a:r>
+          </a:p>
+        </p:txBody>
+      </p:sp>
+      <p:sp>
+        <p:nvSpPr>
+          <p:cNvPr id="17" name="TextBox 16"/>
+          <p:cNvSpPr txBox="1"/>
+          <p:nvPr/>
+        </p:nvSpPr>
+        <p:spPr>
+          <a:xfrm>
+            <a:off x="548640" y="9692640"/>
+            <a:ext cx="17190720" cy="228600"/>
+          </a:xfrm>
+          <a:prstGeom prst="rect">
+            <a:avLst/>
+          </a:prstGeom>
+          <a:noFill/>
+        </p:spPr>
+        <p:txBody>
+          <a:bodyPr wrap="square" lIns="0" rIns="0" tIns="0" bIns="0">
+            <a:spAutoFit/>
+          </a:bodyPr>
+          <a:lstStyle/>
+          <a:p>
+            <a:pPr>
+              <a:defRPr sz="1100" b="0">
+                <a:solidFill>
+                  <a:srgbClr val="243B60"/>
+                </a:solidFill>
+                <a:latin typeface="Segoe UI"/>
+              </a:defRPr>
+            </a:pPr>
+            <a:r>
+              <a:t>Example data is illustrative, not a benchmark. Minimum Group Size defaults to 3.</a:t>
+            </a:r>
+          </a:p>
+        </p:txBody>
+      </p:sp>
+      <p:pic>
+        <p:nvPicPr>
+          <p:cNvPr id="18" name="Approved template chrome 18" descr="Microsoft Copilot"/>
+          <p:cNvPicPr>
+            <a:picLocks noChangeAspect="1"/>
+          </p:cNvPicPr>
+          <p:nvPr/>
+        </p:nvPicPr>
+        <p:blipFill>
+          <a:blip r:embed="rId3"/>
+          <a:stretch>
+            <a:fillRect/>
+          </a:stretch>
+        </p:blipFill>
+        <p:spPr>
+          <a:xfrm>
+            <a:off x="17026128" y="457200"/>
+            <a:ext cx="758952" cy="758952"/>
+          </a:xfrm>
+          <a:prstGeom prst="rect">
+            <a:avLst/>
+          </a:prstGeom>
+        </p:spPr>
+      </p:pic>
+      <p:pic>
+        <p:nvPicPr>
+          <p:cNvPr id="19" name="Approved template chrome 19" descr="Microsoft"/>
+          <p:cNvPicPr>
+            <a:picLocks noChangeAspect="1"/>
+          </p:cNvPicPr>
+          <p:nvPr/>
+        </p:nvPicPr>
+        <p:blipFill>
+          <a:blip r:embed="rId4"/>
+          <a:stretch>
+            <a:fillRect/>
+          </a:stretch>
+        </p:blipFill>
+        <p:spPr>
+          <a:xfrm>
+            <a:off x="713232" y="9729216"/>
+            <a:ext cx="1042416" cy="557784"/>
+          </a:xfrm>
+          <a:prstGeom prst="rect">
+            <a:avLst/>
+          </a:prstGeom>
+        </p:spPr>
+      </p:pic>
+      <p:sp>
+        <p:nvSpPr>
+          <p:cNvPr id="20" name="Approved template chrome 20"/>
+          <p:cNvSpPr/>
+          <p:nvPr/>
+        </p:nvSpPr>
+        <p:spPr>
+          <a:xfrm>
+            <a:off x="16175736" y="9875520"/>
+            <a:ext cx="1499616" cy="292608"/>
+          </a:xfrm>
+          <a:prstGeom prst="rect">
+            <a:avLst/>
+          </a:prstGeom>
+          <a:noFill/>
+          <a:ln/>
+        </p:spPr>
+        <p:txBody>
+          <a:bodyPr wrap="square" lIns="0" tIns="0" rIns="0" bIns="0" rtlCol="0" anchor="ctr"/>
+          <a:lstStyle/>
+          <a:p>
+            <a:pPr marL="0" indent="0" algn="r">
+              <a:buNone/>
+            </a:pPr>
+            <a:r>
+              <a:rPr lang="en-US" sz="1100" dirty="0">
+                <a:solidFill>
+                  <a:srgbClr val="637087"/>
+                </a:solidFill>
+                <a:latin typeface="Segoe UI" pitchFamily="34" charset="0"/>
+                <a:ea typeface="Segoe UI" pitchFamily="34" charset="-122"/>
+                <a:cs typeface="Segoe UI" pitchFamily="34" charset="-120"/>
+              </a:rPr>
+              <a:t>19 / 19</a:t>
+            </a:r>
+            <a:endParaRPr lang="en-US" sz="1100" dirty="0"/>
+          </a:p>
+        </p:txBody>
+      </p:sp>
+      <p:sp>
+        <p:nvSpPr>
+          <p:cNvPr id="21" name="Approved template chrome 21"/>
+          <p:cNvSpPr/>
+          <p:nvPr/>
+        </p:nvSpPr>
+        <p:spPr>
+          <a:xfrm>
+            <a:off x="2103120" y="9875520"/>
+            <a:ext cx="13716000" cy="292608"/>
+          </a:xfrm>
+          <a:prstGeom prst="rect">
+            <a:avLst/>
+          </a:prstGeom>
+          <a:noFill/>
+          <a:ln/>
+        </p:spPr>
+        <p:txBody>
+          <a:bodyPr wrap="square" lIns="0" tIns="0" rIns="0" bIns="0" rtlCol="0" anchor="ctr"/>
+          <a:lstStyle/>
+          <a:p>
+            <a:pPr marL="0" indent="0">
+              <a:buNone/>
+            </a:pPr>
+            <a:r>
+              <a:rPr lang="en-US" sz="1100" dirty="0">
+                <a:solidFill>
+                  <a:srgbClr val="637087"/>
+                </a:solidFill>
+                <a:latin typeface="Segoe UI" pitchFamily="34" charset="0"/>
+                <a:ea typeface="Segoe UI" pitchFamily="34" charset="-122"/>
+                <a:cs typeface="Segoe UI" pitchFamily="34" charset="-120"/>
+              </a:rPr>
+              <a:t>AI-in-One Dashboard v2.0.0  ·  Storyboard  ·  Example data</a:t>
+            </a:r>
+            <a:endParaRPr lang="en-US" sz="1100" dirty="0"/>
           </a:p>
         </p:txBody>
       </p:sp>
@@ -15258,7 +16807,7 @@
                 <a:ea typeface="Segoe UI" pitchFamily="34" charset="-122"/>
                 <a:cs typeface="Segoe UI" pitchFamily="34" charset="-120"/>
               </a:rPr>
-              <a:t>03 / 17</a:t>
+              <a:t>03 / 19</a:t>
             </a:r>
             <a:endParaRPr lang="en-US" sz="1100" dirty="0"/>
           </a:p>
@@ -17062,7 +18611,7 @@
                 <a:ea typeface="Segoe UI" pitchFamily="34" charset="-122"/>
                 <a:cs typeface="Segoe UI" pitchFamily="34" charset="-120"/>
               </a:rPr>
-              <a:t>04 / 17</a:t>
+              <a:t>04 / 19</a:t>
             </a:r>
             <a:endParaRPr lang="en-US" sz="1100" dirty="0"/>
           </a:p>
@@ -18647,7 +20196,7 @@
                 <a:ea typeface="Segoe UI" pitchFamily="34" charset="-122"/>
                 <a:cs typeface="Segoe UI" pitchFamily="34" charset="-120"/>
               </a:rPr>
-              <a:t>05 / 17</a:t>
+              <a:t>05 / 19</a:t>
             </a:r>
             <a:endParaRPr lang="en-US" sz="1100" dirty="0"/>
           </a:p>
@@ -19637,7 +21186,7 @@
                 <a:ea typeface="Segoe UI" pitchFamily="34" charset="-122"/>
                 <a:cs typeface="Segoe UI" pitchFamily="34" charset="-120"/>
               </a:rPr>
-              <a:t>One line each for agents, unlicensed Copilot Chat and M365 Copilot.</a:t>
+              <a:t>Weekly patterns or Monthly comparison: totals, active people and per-active-person ratios.</a:t>
             </a:r>
             <a:endParaRPr lang="en-US" sz="1500" dirty="0"/>
           </a:p>
@@ -19820,7 +21369,7 @@
                 <a:ea typeface="Segoe UI" pitchFamily="34" charset="-122"/>
                 <a:cs typeface="Segoe UI" pitchFamily="34" charset="-120"/>
               </a:rPr>
-              <a:t>Separate bars for each experience. They overlap, so read them side by side.</a:t>
+              <a:t>Paid/free populations may overlap with observed history. Distinct totals count people once.</a:t>
             </a:r>
             <a:endParaRPr lang="en-US" sz="1500" dirty="0"/>
           </a:p>
@@ -20232,7 +21781,7 @@
                 <a:ea typeface="Segoe UI" pitchFamily="34" charset="-122"/>
                 <a:cs typeface="Segoe UI" pitchFamily="34" charset="-120"/>
               </a:rPr>
-              <a:t>06 / 17</a:t>
+              <a:t>06 / 19</a:t>
             </a:r>
             <a:endParaRPr lang="en-US" sz="1100" dirty="0"/>
           </a:p>
@@ -21715,7 +23264,7 @@
                 <a:ea typeface="Segoe UI" pitchFamily="34" charset="-122"/>
                 <a:cs typeface="Segoe UI" pitchFamily="34" charset="-120"/>
               </a:rPr>
-              <a:t>07 / 17</a:t>
+              <a:t>07 / 19</a:t>
             </a:r>
             <a:endParaRPr lang="en-US" sz="1100" dirty="0"/>
           </a:p>
@@ -23436,7 +24985,7 @@
                 <a:ea typeface="Segoe UI" pitchFamily="34" charset="-122"/>
                 <a:cs typeface="Segoe UI" pitchFamily="34" charset="-120"/>
               </a:rPr>
-              <a:t>08 / 17</a:t>
+              <a:t>08 / 19</a:t>
             </a:r>
             <a:endParaRPr lang="en-US" sz="1100" dirty="0"/>
           </a:p>
@@ -25021,7 +26570,7 @@
                 <a:ea typeface="Segoe UI" pitchFamily="34" charset="-122"/>
                 <a:cs typeface="Segoe UI" pitchFamily="34" charset="-120"/>
               </a:rPr>
-              <a:t>09 / 17</a:t>
+              <a:t>09 / 19</a:t>
             </a:r>
             <a:endParaRPr lang="en-US" sz="1100" dirty="0"/>
           </a:p>
